--- a/Capsule-Counterfeit-Detection-Using-Deep-Learning.pptx
+++ b/Capsule-Counterfeit-Detection-Using-Deep-Learning.pptx
@@ -5,37 +5,42 @@
     <p:sldMasterId id="2147483648" r:id="rId1"/>
   </p:sldMasterIdLst>
   <p:notesMasterIdLst>
-    <p:notesMasterId r:id="rId13"/>
+    <p:notesMasterId r:id="rId14"/>
   </p:notesMasterIdLst>
   <p:sldIdLst>
     <p:sldId id="256" r:id="rId2"/>
     <p:sldId id="257" r:id="rId3"/>
     <p:sldId id="258" r:id="rId4"/>
-    <p:sldId id="259" r:id="rId5"/>
-    <p:sldId id="260" r:id="rId6"/>
-    <p:sldId id="261" r:id="rId7"/>
-    <p:sldId id="262" r:id="rId8"/>
-    <p:sldId id="263" r:id="rId9"/>
-    <p:sldId id="264" r:id="rId10"/>
-    <p:sldId id="265" r:id="rId11"/>
-    <p:sldId id="266" r:id="rId12"/>
+    <p:sldId id="267" r:id="rId5"/>
+    <p:sldId id="259" r:id="rId6"/>
+    <p:sldId id="260" r:id="rId7"/>
+    <p:sldId id="261" r:id="rId8"/>
+    <p:sldId id="262" r:id="rId9"/>
+    <p:sldId id="263" r:id="rId10"/>
+    <p:sldId id="264" r:id="rId11"/>
+    <p:sldId id="265" r:id="rId12"/>
+    <p:sldId id="266" r:id="rId13"/>
   </p:sldIdLst>
   <p:sldSz cx="14630400" cy="8229600"/>
   <p:notesSz cx="8229600" cy="14630400"/>
   <p:embeddedFontLst>
     <p:embeddedFont>
+      <p:font typeface="Barlow Bold" panose="00000800000000000000" pitchFamily="2" charset="0"/>
+      <p:bold r:id="rId15"/>
+    </p:embeddedFont>
+    <p:embeddedFont>
       <p:font typeface="Calibri" panose="020F0502020204030204" pitchFamily="34" charset="0"/>
-      <p:regular r:id="rId14"/>
-      <p:bold r:id="rId15"/>
-      <p:italic r:id="rId16"/>
-      <p:boldItalic r:id="rId17"/>
+      <p:regular r:id="rId16"/>
+      <p:bold r:id="rId17"/>
+      <p:italic r:id="rId18"/>
+      <p:boldItalic r:id="rId19"/>
     </p:embeddedFont>
     <p:embeddedFont>
       <p:font typeface="Montserrat" pitchFamily="2" charset="0"/>
-      <p:regular r:id="rId18"/>
-      <p:bold r:id="rId19"/>
-      <p:italic r:id="rId20"/>
-      <p:boldItalic r:id="rId21"/>
+      <p:regular r:id="rId20"/>
+      <p:bold r:id="rId21"/>
+      <p:italic r:id="rId22"/>
+      <p:boldItalic r:id="rId23"/>
     </p:embeddedFont>
   </p:embeddedFontLst>
   <p:defaultTextStyle>
@@ -518,6 +523,90 @@
 </p:notes>
 </file>
 
+<file path=ppt/notesSlides/notesSlide12.xml><?xml version="1.0" encoding="utf-8"?>
+<p:notes xmlns:a="http://schemas.openxmlformats.org/drawingml/2006/main" xmlns:r="http://schemas.openxmlformats.org/officeDocument/2006/relationships" xmlns:p="http://schemas.openxmlformats.org/presentationml/2006/main">
+  <p:cSld>
+    <p:spTree>
+      <p:nvGrpSpPr>
+        <p:cNvPr id="1" name=""/>
+        <p:cNvGrpSpPr/>
+        <p:nvPr/>
+      </p:nvGrpSpPr>
+      <p:grpSpPr>
+        <a:xfrm>
+          <a:off x="0" y="0"/>
+          <a:ext cx="0" cy="0"/>
+          <a:chOff x="0" y="0"/>
+          <a:chExt cx="0" cy="0"/>
+        </a:xfrm>
+      </p:grpSpPr>
+      <p:sp>
+        <p:nvSpPr>
+          <p:cNvPr id="2" name="Slide Image Placeholder 1"/>
+          <p:cNvSpPr>
+            <a:spLocks noGrp="1" noRot="1" noChangeAspect="1"/>
+          </p:cNvSpPr>
+          <p:nvPr>
+            <p:ph type="sldImg"/>
+          </p:nvPr>
+        </p:nvSpPr>
+        <p:spPr/>
+      </p:sp>
+      <p:sp>
+        <p:nvSpPr>
+          <p:cNvPr id="3" name="Notes Placeholder 2"/>
+          <p:cNvSpPr>
+            <a:spLocks noGrp="1"/>
+          </p:cNvSpPr>
+          <p:nvPr>
+            <p:ph type="body" idx="1"/>
+          </p:nvPr>
+        </p:nvSpPr>
+        <p:spPr/>
+        <p:txBody>
+          <a:bodyPr/>
+          <a:lstStyle/>
+          <a:p>
+            <a:endParaRPr lang="en-US" dirty="0"/>
+          </a:p>
+        </p:txBody>
+      </p:sp>
+      <p:sp>
+        <p:nvSpPr>
+          <p:cNvPr id="4" name="Slide Number Placeholder 3"/>
+          <p:cNvSpPr>
+            <a:spLocks noGrp="1"/>
+          </p:cNvSpPr>
+          <p:nvPr>
+            <p:ph type="sldNum" sz="quarter" idx="10"/>
+          </p:nvPr>
+        </p:nvSpPr>
+        <p:spPr/>
+        <p:txBody>
+          <a:bodyPr/>
+          <a:lstStyle/>
+          <a:p>
+            <a:fld id="{F7021451-1387-4CA6-816F-3879F97B5CBC}" type="slidenum">
+              <a:rPr lang="en-US"/>
+              <a:t>12</a:t>
+            </a:fld>
+            <a:endParaRPr lang="en-US"/>
+          </a:p>
+        </p:txBody>
+      </p:sp>
+    </p:spTree>
+    <p:extLst>
+      <p:ext uri="{BB962C8B-B14F-4D97-AF65-F5344CB8AC3E}">
+        <p14:creationId xmlns:p14="http://schemas.microsoft.com/office/powerpoint/2010/main" val="1024086991"/>
+      </p:ext>
+    </p:extLst>
+  </p:cSld>
+  <p:clrMapOvr>
+    <a:masterClrMapping/>
+  </p:clrMapOvr>
+</p:notes>
+</file>
+
 <file path=ppt/notesSlides/notesSlide2.xml><?xml version="1.0" encoding="utf-8"?>
 <p:notes xmlns:a="http://schemas.openxmlformats.org/drawingml/2006/main" xmlns:r="http://schemas.openxmlformats.org/officeDocument/2006/relationships" xmlns:p="http://schemas.openxmlformats.org/presentationml/2006/main">
   <p:cSld>
@@ -760,7 +849,7 @@
     </p:spTree>
     <p:extLst>
       <p:ext uri="{BB962C8B-B14F-4D97-AF65-F5344CB8AC3E}">
-        <p14:creationId xmlns:p14="http://schemas.microsoft.com/office/powerpoint/2010/main" val="1024086991"/>
+        <p14:creationId xmlns:p14="http://schemas.microsoft.com/office/powerpoint/2010/main" val="82749577"/>
       </p:ext>
     </p:extLst>
   </p:cSld>
@@ -2902,7 +2991,7 @@
 
 <file path=ppt/slides/slide10.xml><?xml version="1.0" encoding="utf-8"?>
 <p:sld xmlns:a="http://schemas.openxmlformats.org/drawingml/2006/main" xmlns:r="http://schemas.openxmlformats.org/officeDocument/2006/relationships" xmlns:p="http://schemas.openxmlformats.org/presentationml/2006/main">
-  <p:cSld name="Slide 10">
+  <p:cSld name="Slide 9">
     <p:spTree>
       <p:nvGrpSpPr>
         <p:cNvPr id="1" name=""/>
@@ -2917,16 +3006,40 @@
           <a:chExt cx="0" cy="0"/>
         </a:xfrm>
       </p:grpSpPr>
-      <p:sp>
-        <p:nvSpPr>
-          <p:cNvPr id="2" name="Text 0"/>
-          <p:cNvSpPr/>
-          <p:nvPr/>
-        </p:nvSpPr>
-        <p:spPr>
-          <a:xfrm>
-            <a:off x="758309" y="2312908"/>
-            <a:ext cx="6497717" cy="712708"/>
+      <p:pic>
+        <p:nvPicPr>
+          <p:cNvPr id="2" name="Image 0" descr="preencoded.png"/>
+          <p:cNvPicPr>
+            <a:picLocks noChangeAspect="1"/>
+          </p:cNvPicPr>
+          <p:nvPr/>
+        </p:nvPicPr>
+        <p:blipFill>
+          <a:blip r:embed="rId3"/>
+          <a:stretch>
+            <a:fillRect/>
+          </a:stretch>
+        </p:blipFill>
+        <p:spPr>
+          <a:xfrm>
+            <a:off x="0" y="0"/>
+            <a:ext cx="14630400" cy="4265533"/>
+          </a:xfrm>
+          <a:prstGeom prst="rect">
+            <a:avLst/>
+          </a:prstGeom>
+        </p:spPr>
+      </p:pic>
+      <p:sp>
+        <p:nvSpPr>
+          <p:cNvPr id="3" name="Text 0"/>
+          <p:cNvSpPr/>
+          <p:nvPr/>
+        </p:nvSpPr>
+        <p:spPr>
+          <a:xfrm>
+            <a:off x="758309" y="4813221"/>
+            <a:ext cx="5701546" cy="712708"/>
           </a:xfrm>
           <a:prstGeom prst="rect">
             <a:avLst/>
@@ -2953,7 +3066,7 @@
                 <a:ea typeface="Barlow Bold" pitchFamily="34" charset="-122"/>
                 <a:cs typeface="Barlow Bold" pitchFamily="34" charset="-120"/>
               </a:rPr>
-              <a:t>Future Work &amp; Conclusion</a:t>
+              <a:t>Challenges</a:t>
             </a:r>
             <a:endParaRPr lang="en-US" sz="4450" dirty="0"/>
           </a:p>
@@ -2961,13 +3074,40 @@
       </p:sp>
       <p:sp>
         <p:nvSpPr>
-          <p:cNvPr id="3" name="Text 1"/>
-          <p:cNvSpPr/>
-          <p:nvPr/>
-        </p:nvSpPr>
-        <p:spPr>
-          <a:xfrm>
-            <a:off x="758309" y="3567113"/>
+          <p:cNvPr id="4" name="Shape 1"/>
+          <p:cNvSpPr/>
+          <p:nvPr/>
+        </p:nvSpPr>
+        <p:spPr>
+          <a:xfrm>
+            <a:off x="758309" y="5850850"/>
+            <a:ext cx="4226838" cy="1627942"/>
+          </a:xfrm>
+          <a:prstGeom prst="roundRect">
+            <a:avLst>
+              <a:gd name="adj" fmla="val 19963"/>
+            </a:avLst>
+          </a:prstGeom>
+          <a:solidFill>
+            <a:srgbClr val="D4E9F7"/>
+          </a:solidFill>
+          <a:ln w="7620">
+            <a:solidFill>
+              <a:srgbClr val="BACFDD"/>
+            </a:solidFill>
+            <a:prstDash val="solid"/>
+          </a:ln>
+        </p:spPr>
+      </p:sp>
+      <p:sp>
+        <p:nvSpPr>
+          <p:cNvPr id="5" name="Text 2"/>
+          <p:cNvSpPr/>
+          <p:nvPr/>
+        </p:nvSpPr>
+        <p:spPr>
+          <a:xfrm>
+            <a:off x="982504" y="6075045"/>
             <a:ext cx="2850713" cy="356235"/>
           </a:xfrm>
           <a:prstGeom prst="rect">
@@ -2989,13 +3129,13 @@
             <a:r>
               <a:rPr lang="en-US" sz="2200" b="1" dirty="0">
                 <a:solidFill>
-                  <a:srgbClr val="2E3C4E"/>
+                  <a:srgbClr val="384653"/>
                 </a:solidFill>
                 <a:latin typeface="Barlow Bold" pitchFamily="34" charset="0"/>
                 <a:ea typeface="Barlow Bold" pitchFamily="34" charset="-122"/>
                 <a:cs typeface="Barlow Bold" pitchFamily="34" charset="-120"/>
               </a:rPr>
-              <a:t>Future Work</a:t>
+              <a:t>Class Confusion</a:t>
             </a:r>
             <a:endParaRPr lang="en-US" sz="2200" dirty="0"/>
           </a:p>
@@ -3003,14 +3143,14 @@
       </p:sp>
       <p:sp>
         <p:nvSpPr>
-          <p:cNvPr id="4" name="Text 2"/>
-          <p:cNvSpPr/>
-          <p:nvPr/>
-        </p:nvSpPr>
-        <p:spPr>
-          <a:xfrm>
-            <a:off x="758309" y="4139922"/>
-            <a:ext cx="6292572" cy="346710"/>
+          <p:cNvPr id="6" name="Text 3"/>
+          <p:cNvSpPr/>
+          <p:nvPr/>
+        </p:nvSpPr>
+        <p:spPr>
+          <a:xfrm>
+            <a:off x="982504" y="6561177"/>
+            <a:ext cx="3778448" cy="693420"/>
           </a:xfrm>
           <a:prstGeom prst="rect">
             <a:avLst/>
@@ -3019,15 +3159,14 @@
           <a:ln/>
         </p:spPr>
         <p:txBody>
-          <a:bodyPr wrap="none" lIns="0" tIns="0" rIns="0" bIns="0" rtlCol="0" anchor="t"/>
-          <a:lstStyle/>
-          <a:p>
-            <a:pPr marL="342900" indent="-342900" algn="l">
+          <a:bodyPr wrap="square" lIns="0" tIns="0" rIns="0" bIns="0" rtlCol="0" anchor="t"/>
+          <a:lstStyle/>
+          <a:p>
+            <a:pPr marL="0" indent="0" algn="l">
               <a:lnSpc>
                 <a:spcPts val="2700"/>
               </a:lnSpc>
-              <a:buSzPct val="100000"/>
-              <a:buChar char="•"/>
+              <a:buNone/>
             </a:pPr>
             <a:r>
               <a:rPr lang="en-US" sz="1700" dirty="0">
@@ -3038,7 +3177,7 @@
                 <a:ea typeface="Montserrat" pitchFamily="34" charset="-122"/>
                 <a:cs typeface="Montserrat" pitchFamily="34" charset="-120"/>
               </a:rPr>
-              <a:t>Expand dataset with more brands and variations.</a:t>
+              <a:t>Visually identical capsules pose classification difficulties.</a:t>
             </a:r>
             <a:endParaRPr lang="en-US" sz="1700" dirty="0"/>
           </a:p>
@@ -3046,100 +3185,41 @@
       </p:sp>
       <p:sp>
         <p:nvSpPr>
-          <p:cNvPr id="5" name="Text 3"/>
-          <p:cNvSpPr/>
-          <p:nvPr/>
-        </p:nvSpPr>
-        <p:spPr>
-          <a:xfrm>
-            <a:off x="758309" y="4562356"/>
-            <a:ext cx="6292572" cy="346710"/>
-          </a:xfrm>
-          <a:prstGeom prst="rect">
-            <a:avLst/>
-          </a:prstGeom>
-          <a:noFill/>
-          <a:ln/>
-        </p:spPr>
-        <p:txBody>
-          <a:bodyPr wrap="none" lIns="0" tIns="0" rIns="0" bIns="0" rtlCol="0" anchor="t"/>
-          <a:lstStyle/>
-          <a:p>
-            <a:pPr marL="342900" indent="-342900" algn="l">
-              <a:lnSpc>
-                <a:spcPts val="2700"/>
-              </a:lnSpc>
-              <a:buSzPct val="100000"/>
-              <a:buChar char="•"/>
-            </a:pPr>
-            <a:r>
-              <a:rPr lang="en-US" sz="1700" dirty="0">
-                <a:solidFill>
-                  <a:srgbClr val="384653"/>
-                </a:solidFill>
-                <a:latin typeface="Montserrat" pitchFamily="34" charset="0"/>
-                <a:ea typeface="Montserrat" pitchFamily="34" charset="-122"/>
-                <a:cs typeface="Montserrat" pitchFamily="34" charset="-120"/>
-              </a:rPr>
-              <a:t>Explore Triplet Networks or transformer-based models.</a:t>
-            </a:r>
-            <a:endParaRPr lang="en-US" sz="1700" dirty="0"/>
-          </a:p>
-        </p:txBody>
-      </p:sp>
-      <p:sp>
-        <p:nvSpPr>
-          <p:cNvPr id="6" name="Text 4"/>
-          <p:cNvSpPr/>
-          <p:nvPr/>
-        </p:nvSpPr>
-        <p:spPr>
-          <a:xfrm>
-            <a:off x="758309" y="4984790"/>
-            <a:ext cx="6292572" cy="693420"/>
-          </a:xfrm>
-          <a:prstGeom prst="rect">
-            <a:avLst/>
-          </a:prstGeom>
-          <a:noFill/>
-          <a:ln/>
-        </p:spPr>
-        <p:txBody>
-          <a:bodyPr wrap="square" lIns="0" tIns="0" rIns="0" bIns="0" rtlCol="0" anchor="t"/>
-          <a:lstStyle/>
-          <a:p>
-            <a:pPr marL="342900" indent="-342900" algn="l">
-              <a:lnSpc>
-                <a:spcPts val="2700"/>
-              </a:lnSpc>
-              <a:buSzPct val="100000"/>
-              <a:buChar char="•"/>
-            </a:pPr>
-            <a:r>
-              <a:rPr lang="en-US" sz="1700" dirty="0">
-                <a:solidFill>
-                  <a:srgbClr val="384653"/>
-                </a:solidFill>
-                <a:latin typeface="Montserrat" pitchFamily="34" charset="0"/>
-                <a:ea typeface="Montserrat" pitchFamily="34" charset="-122"/>
-                <a:cs typeface="Montserrat" pitchFamily="34" charset="-120"/>
-              </a:rPr>
-              <a:t>Deploy on mobile (Android) using ONNX or TensorFlow Lite.</a:t>
-            </a:r>
-            <a:endParaRPr lang="en-US" sz="1700" dirty="0"/>
-          </a:p>
-        </p:txBody>
-      </p:sp>
-      <p:sp>
-        <p:nvSpPr>
-          <p:cNvPr id="7" name="Text 5"/>
-          <p:cNvSpPr/>
-          <p:nvPr/>
-        </p:nvSpPr>
-        <p:spPr>
-          <a:xfrm>
-            <a:off x="7587139" y="3567113"/>
-            <a:ext cx="2850713" cy="356235"/>
+          <p:cNvPr id="7" name="Shape 4"/>
+          <p:cNvSpPr/>
+          <p:nvPr/>
+        </p:nvSpPr>
+        <p:spPr>
+          <a:xfrm>
+            <a:off x="5201722" y="5850850"/>
+            <a:ext cx="4226838" cy="1627942"/>
+          </a:xfrm>
+          <a:prstGeom prst="roundRect">
+            <a:avLst>
+              <a:gd name="adj" fmla="val 19963"/>
+            </a:avLst>
+          </a:prstGeom>
+          <a:solidFill>
+            <a:srgbClr val="D4E9F7"/>
+          </a:solidFill>
+          <a:ln w="7620">
+            <a:solidFill>
+              <a:srgbClr val="BACFDD"/>
+            </a:solidFill>
+            <a:prstDash val="solid"/>
+          </a:ln>
+        </p:spPr>
+      </p:sp>
+      <p:sp>
+        <p:nvSpPr>
+          <p:cNvPr id="8" name="Text 5"/>
+          <p:cNvSpPr/>
+          <p:nvPr/>
+        </p:nvSpPr>
+        <p:spPr>
+          <a:xfrm>
+            <a:off x="5425916" y="6075045"/>
+            <a:ext cx="2855595" cy="356235"/>
           </a:xfrm>
           <a:prstGeom prst="rect">
             <a:avLst/>
@@ -3160,13 +3240,13 @@
             <a:r>
               <a:rPr lang="en-US" sz="2200" b="1" dirty="0">
                 <a:solidFill>
-                  <a:srgbClr val="2E3C4E"/>
+                  <a:srgbClr val="384653"/>
                 </a:solidFill>
                 <a:latin typeface="Barlow Bold" pitchFamily="34" charset="0"/>
                 <a:ea typeface="Barlow Bold" pitchFamily="34" charset="-122"/>
                 <a:cs typeface="Barlow Bold" pitchFamily="34" charset="-120"/>
               </a:rPr>
-              <a:t>Conclusion</a:t>
+              <a:t>Environmental Factors</a:t>
             </a:r>
             <a:endParaRPr lang="en-US" sz="2200" dirty="0"/>
           </a:p>
@@ -3174,14 +3254,14 @@
       </p:sp>
       <p:sp>
         <p:nvSpPr>
-          <p:cNvPr id="8" name="Text 6"/>
-          <p:cNvSpPr/>
-          <p:nvPr/>
-        </p:nvSpPr>
-        <p:spPr>
-          <a:xfrm>
-            <a:off x="7587139" y="4139922"/>
-            <a:ext cx="6292572" cy="693420"/>
+          <p:cNvPr id="9" name="Text 6"/>
+          <p:cNvSpPr/>
+          <p:nvPr/>
+        </p:nvSpPr>
+        <p:spPr>
+          <a:xfrm>
+            <a:off x="5425916" y="6561177"/>
+            <a:ext cx="3778448" cy="693420"/>
           </a:xfrm>
           <a:prstGeom prst="rect">
             <a:avLst/>
@@ -3200,7 +3280,7 @@
               <a:buNone/>
             </a:pPr>
             <a:r>
-              <a:rPr lang="en-US" sz="1700" b="1" dirty="0">
+              <a:rPr lang="en-US" sz="1700" dirty="0">
                 <a:solidFill>
                   <a:srgbClr val="384653"/>
                 </a:solidFill>
@@ -3208,33 +3288,91 @@
                 <a:ea typeface="Montserrat" pitchFamily="34" charset="-122"/>
                 <a:cs typeface="Montserrat" pitchFamily="34" charset="-120"/>
               </a:rPr>
-              <a:t>The Imperative:</a:t>
-            </a:r>
-            <a:r>
-              <a:rPr lang="en-US" sz="1700" dirty="0">
+              <a:t>Lighting, blur, and camera quality impact detection accuracy.</a:t>
+            </a:r>
+            <a:endParaRPr lang="en-US" sz="1700" dirty="0"/>
+          </a:p>
+        </p:txBody>
+      </p:sp>
+      <p:sp>
+        <p:nvSpPr>
+          <p:cNvPr id="10" name="Shape 7"/>
+          <p:cNvSpPr/>
+          <p:nvPr/>
+        </p:nvSpPr>
+        <p:spPr>
+          <a:xfrm>
+            <a:off x="9645134" y="5850850"/>
+            <a:ext cx="4226957" cy="1627942"/>
+          </a:xfrm>
+          <a:prstGeom prst="roundRect">
+            <a:avLst>
+              <a:gd name="adj" fmla="val 19963"/>
+            </a:avLst>
+          </a:prstGeom>
+          <a:solidFill>
+            <a:srgbClr val="D4E9F7"/>
+          </a:solidFill>
+          <a:ln w="7620">
+            <a:solidFill>
+              <a:srgbClr val="BACFDD"/>
+            </a:solidFill>
+            <a:prstDash val="solid"/>
+          </a:ln>
+        </p:spPr>
+      </p:sp>
+      <p:sp>
+        <p:nvSpPr>
+          <p:cNvPr id="11" name="Text 8"/>
+          <p:cNvSpPr/>
+          <p:nvPr/>
+        </p:nvSpPr>
+        <p:spPr>
+          <a:xfrm>
+            <a:off x="9869329" y="6075045"/>
+            <a:ext cx="2850713" cy="356235"/>
+          </a:xfrm>
+          <a:prstGeom prst="rect">
+            <a:avLst/>
+          </a:prstGeom>
+          <a:noFill/>
+          <a:ln/>
+        </p:spPr>
+        <p:txBody>
+          <a:bodyPr wrap="none" lIns="0" tIns="0" rIns="0" bIns="0" rtlCol="0" anchor="t"/>
+          <a:lstStyle/>
+          <a:p>
+            <a:pPr marL="0" indent="0" algn="l">
+              <a:lnSpc>
+                <a:spcPts val="2800"/>
+              </a:lnSpc>
+              <a:buNone/>
+            </a:pPr>
+            <a:r>
+              <a:rPr lang="en-US" sz="2200" b="1" dirty="0">
                 <a:solidFill>
                   <a:srgbClr val="384653"/>
                 </a:solidFill>
-                <a:latin typeface="Montserrat" pitchFamily="34" charset="0"/>
-                <a:ea typeface="Montserrat" pitchFamily="34" charset="-122"/>
-                <a:cs typeface="Montserrat" pitchFamily="34" charset="-120"/>
-              </a:rPr>
-              <a:t> Protecting global health from counterfeit drugs.</a:t>
-            </a:r>
-            <a:endParaRPr lang="en-US" sz="1700" dirty="0"/>
-          </a:p>
-        </p:txBody>
-      </p:sp>
-      <p:sp>
-        <p:nvSpPr>
-          <p:cNvPr id="9" name="Text 7"/>
-          <p:cNvSpPr/>
-          <p:nvPr/>
-        </p:nvSpPr>
-        <p:spPr>
-          <a:xfrm>
-            <a:off x="7587139" y="5028248"/>
-            <a:ext cx="6292572" cy="693420"/>
+                <a:latin typeface="Barlow Bold" pitchFamily="34" charset="0"/>
+                <a:ea typeface="Barlow Bold" pitchFamily="34" charset="-122"/>
+                <a:cs typeface="Barlow Bold" pitchFamily="34" charset="-120"/>
+              </a:rPr>
+              <a:t>Dataset Limitations</a:t>
+            </a:r>
+            <a:endParaRPr lang="en-US" sz="2200" dirty="0"/>
+          </a:p>
+        </p:txBody>
+      </p:sp>
+      <p:sp>
+        <p:nvSpPr>
+          <p:cNvPr id="12" name="Text 9"/>
+          <p:cNvSpPr/>
+          <p:nvPr/>
+        </p:nvSpPr>
+        <p:spPr>
+          <a:xfrm>
+            <a:off x="9869329" y="6561177"/>
+            <a:ext cx="3778568" cy="693420"/>
           </a:xfrm>
           <a:prstGeom prst="rect">
             <a:avLst/>
@@ -3253,7 +3391,7 @@
               <a:buNone/>
             </a:pPr>
             <a:r>
-              <a:rPr lang="en-US" sz="1700" b="1" dirty="0">
+              <a:rPr lang="en-US" sz="1700" dirty="0">
                 <a:solidFill>
                   <a:srgbClr val="384653"/>
                 </a:solidFill>
@@ -3261,18 +3399,7 @@
                 <a:ea typeface="Montserrat" pitchFamily="34" charset="-122"/>
                 <a:cs typeface="Montserrat" pitchFamily="34" charset="-120"/>
               </a:rPr>
-              <a:t>Investment in Innovation:</a:t>
-            </a:r>
-            <a:r>
-              <a:rPr lang="en-US" sz="1700" dirty="0">
-                <a:solidFill>
-                  <a:srgbClr val="384653"/>
-                </a:solidFill>
-                <a:latin typeface="Montserrat" pitchFamily="34" charset="0"/>
-                <a:ea typeface="Montserrat" pitchFamily="34" charset="-122"/>
-                <a:cs typeface="Montserrat" pitchFamily="34" charset="-120"/>
-              </a:rPr>
-              <a:t> Key to a safer, more secure pharmaceutical supply chain.</a:t>
+              <a:t>Limited diversity in the current dataset.</a:t>
             </a:r>
             <a:endParaRPr lang="en-US" sz="1700" dirty="0"/>
           </a:p>
@@ -3280,10 +3407,10 @@
       </p:sp>
       <p:sp>
         <p:nvSpPr>
-          <p:cNvPr id="10" name="Rectangle 9">
+          <p:cNvPr id="13" name="Rectangle 12">
             <a:extLst>
               <a:ext uri="{FF2B5EF4-FFF2-40B4-BE49-F238E27FC236}">
-                <a16:creationId xmlns:a16="http://schemas.microsoft.com/office/drawing/2014/main" id="{34FFC9E9-E906-4B60-A2B7-D9C9E8AD1916}"/>
+                <a16:creationId xmlns:a16="http://schemas.microsoft.com/office/drawing/2014/main" id="{C460A0E1-5137-4DBF-8C59-6A9EB24A1D0D}"/>
               </a:ext>
             </a:extLst>
           </p:cNvPr>
@@ -3339,6 +3466,444 @@
 </file>
 
 <file path=ppt/slides/slide11.xml><?xml version="1.0" encoding="utf-8"?>
+<p:sld xmlns:a="http://schemas.openxmlformats.org/drawingml/2006/main" xmlns:r="http://schemas.openxmlformats.org/officeDocument/2006/relationships" xmlns:p="http://schemas.openxmlformats.org/presentationml/2006/main">
+  <p:cSld name="Slide 10">
+    <p:spTree>
+      <p:nvGrpSpPr>
+        <p:cNvPr id="1" name=""/>
+        <p:cNvGrpSpPr/>
+        <p:nvPr/>
+      </p:nvGrpSpPr>
+      <p:grpSpPr>
+        <a:xfrm>
+          <a:off x="0" y="0"/>
+          <a:ext cx="0" cy="0"/>
+          <a:chOff x="0" y="0"/>
+          <a:chExt cx="0" cy="0"/>
+        </a:xfrm>
+      </p:grpSpPr>
+      <p:sp>
+        <p:nvSpPr>
+          <p:cNvPr id="2" name="Text 0"/>
+          <p:cNvSpPr/>
+          <p:nvPr/>
+        </p:nvSpPr>
+        <p:spPr>
+          <a:xfrm>
+            <a:off x="758309" y="2312908"/>
+            <a:ext cx="6497717" cy="712708"/>
+          </a:xfrm>
+          <a:prstGeom prst="rect">
+            <a:avLst/>
+          </a:prstGeom>
+          <a:noFill/>
+          <a:ln/>
+        </p:spPr>
+        <p:txBody>
+          <a:bodyPr wrap="none" lIns="0" tIns="0" rIns="0" bIns="0" rtlCol="0" anchor="t"/>
+          <a:lstStyle/>
+          <a:p>
+            <a:pPr marL="0" indent="0" algn="l">
+              <a:lnSpc>
+                <a:spcPts val="5600"/>
+              </a:lnSpc>
+              <a:buNone/>
+            </a:pPr>
+            <a:r>
+              <a:rPr lang="en-US" sz="4450" b="1" dirty="0">
+                <a:solidFill>
+                  <a:srgbClr val="2E3C4E"/>
+                </a:solidFill>
+                <a:latin typeface="Barlow Bold" pitchFamily="34" charset="0"/>
+                <a:ea typeface="Barlow Bold" pitchFamily="34" charset="-122"/>
+                <a:cs typeface="Barlow Bold" pitchFamily="34" charset="-120"/>
+              </a:rPr>
+              <a:t>Future Work &amp; Conclusion</a:t>
+            </a:r>
+            <a:endParaRPr lang="en-US" sz="4450" dirty="0"/>
+          </a:p>
+        </p:txBody>
+      </p:sp>
+      <p:sp>
+        <p:nvSpPr>
+          <p:cNvPr id="3" name="Text 1"/>
+          <p:cNvSpPr/>
+          <p:nvPr/>
+        </p:nvSpPr>
+        <p:spPr>
+          <a:xfrm>
+            <a:off x="758309" y="3567113"/>
+            <a:ext cx="2850713" cy="356235"/>
+          </a:xfrm>
+          <a:prstGeom prst="rect">
+            <a:avLst/>
+          </a:prstGeom>
+          <a:noFill/>
+          <a:ln/>
+        </p:spPr>
+        <p:txBody>
+          <a:bodyPr wrap="none" lIns="0" tIns="0" rIns="0" bIns="0" rtlCol="0" anchor="t"/>
+          <a:lstStyle/>
+          <a:p>
+            <a:pPr marL="0" indent="0" algn="l">
+              <a:lnSpc>
+                <a:spcPts val="2800"/>
+              </a:lnSpc>
+              <a:buNone/>
+            </a:pPr>
+            <a:r>
+              <a:rPr lang="en-US" sz="2200" b="1" dirty="0">
+                <a:solidFill>
+                  <a:srgbClr val="2E3C4E"/>
+                </a:solidFill>
+                <a:latin typeface="Barlow Bold" pitchFamily="34" charset="0"/>
+                <a:ea typeface="Barlow Bold" pitchFamily="34" charset="-122"/>
+                <a:cs typeface="Barlow Bold" pitchFamily="34" charset="-120"/>
+              </a:rPr>
+              <a:t>Future Work</a:t>
+            </a:r>
+            <a:endParaRPr lang="en-US" sz="2200" dirty="0"/>
+          </a:p>
+        </p:txBody>
+      </p:sp>
+      <p:sp>
+        <p:nvSpPr>
+          <p:cNvPr id="4" name="Text 2"/>
+          <p:cNvSpPr/>
+          <p:nvPr/>
+        </p:nvSpPr>
+        <p:spPr>
+          <a:xfrm>
+            <a:off x="758309" y="4139922"/>
+            <a:ext cx="6292572" cy="346710"/>
+          </a:xfrm>
+          <a:prstGeom prst="rect">
+            <a:avLst/>
+          </a:prstGeom>
+          <a:noFill/>
+          <a:ln/>
+        </p:spPr>
+        <p:txBody>
+          <a:bodyPr wrap="none" lIns="0" tIns="0" rIns="0" bIns="0" rtlCol="0" anchor="t"/>
+          <a:lstStyle/>
+          <a:p>
+            <a:pPr marL="342900" indent="-342900" algn="l">
+              <a:lnSpc>
+                <a:spcPts val="2700"/>
+              </a:lnSpc>
+              <a:buSzPct val="100000"/>
+              <a:buChar char="•"/>
+            </a:pPr>
+            <a:r>
+              <a:rPr lang="en-US" sz="1700" dirty="0">
+                <a:solidFill>
+                  <a:srgbClr val="384653"/>
+                </a:solidFill>
+                <a:latin typeface="Montserrat" pitchFamily="34" charset="0"/>
+                <a:ea typeface="Montserrat" pitchFamily="34" charset="-122"/>
+                <a:cs typeface="Montserrat" pitchFamily="34" charset="-120"/>
+              </a:rPr>
+              <a:t>Expand dataset with more brands and variations.</a:t>
+            </a:r>
+            <a:endParaRPr lang="en-US" sz="1700" dirty="0"/>
+          </a:p>
+        </p:txBody>
+      </p:sp>
+      <p:sp>
+        <p:nvSpPr>
+          <p:cNvPr id="5" name="Text 3"/>
+          <p:cNvSpPr/>
+          <p:nvPr/>
+        </p:nvSpPr>
+        <p:spPr>
+          <a:xfrm>
+            <a:off x="758309" y="4562356"/>
+            <a:ext cx="6292572" cy="346710"/>
+          </a:xfrm>
+          <a:prstGeom prst="rect">
+            <a:avLst/>
+          </a:prstGeom>
+          <a:noFill/>
+          <a:ln/>
+        </p:spPr>
+        <p:txBody>
+          <a:bodyPr wrap="none" lIns="0" tIns="0" rIns="0" bIns="0" rtlCol="0" anchor="t"/>
+          <a:lstStyle/>
+          <a:p>
+            <a:pPr marL="342900" indent="-342900" algn="l">
+              <a:lnSpc>
+                <a:spcPts val="2700"/>
+              </a:lnSpc>
+              <a:buSzPct val="100000"/>
+              <a:buChar char="•"/>
+            </a:pPr>
+            <a:r>
+              <a:rPr lang="en-US" sz="1700" dirty="0">
+                <a:solidFill>
+                  <a:srgbClr val="384653"/>
+                </a:solidFill>
+                <a:latin typeface="Montserrat" pitchFamily="34" charset="0"/>
+                <a:ea typeface="Montserrat" pitchFamily="34" charset="-122"/>
+                <a:cs typeface="Montserrat" pitchFamily="34" charset="-120"/>
+              </a:rPr>
+              <a:t>Explore Triplet Networks or transformer-based models.</a:t>
+            </a:r>
+            <a:endParaRPr lang="en-US" sz="1700" dirty="0"/>
+          </a:p>
+        </p:txBody>
+      </p:sp>
+      <p:sp>
+        <p:nvSpPr>
+          <p:cNvPr id="6" name="Text 4"/>
+          <p:cNvSpPr/>
+          <p:nvPr/>
+        </p:nvSpPr>
+        <p:spPr>
+          <a:xfrm>
+            <a:off x="758309" y="4984790"/>
+            <a:ext cx="6292572" cy="693420"/>
+          </a:xfrm>
+          <a:prstGeom prst="rect">
+            <a:avLst/>
+          </a:prstGeom>
+          <a:noFill/>
+          <a:ln/>
+        </p:spPr>
+        <p:txBody>
+          <a:bodyPr wrap="square" lIns="0" tIns="0" rIns="0" bIns="0" rtlCol="0" anchor="t"/>
+          <a:lstStyle/>
+          <a:p>
+            <a:pPr marL="342900" indent="-342900" algn="l">
+              <a:lnSpc>
+                <a:spcPts val="2700"/>
+              </a:lnSpc>
+              <a:buSzPct val="100000"/>
+              <a:buChar char="•"/>
+            </a:pPr>
+            <a:r>
+              <a:rPr lang="en-US" sz="1700" dirty="0">
+                <a:solidFill>
+                  <a:srgbClr val="384653"/>
+                </a:solidFill>
+                <a:latin typeface="Montserrat" pitchFamily="34" charset="0"/>
+                <a:ea typeface="Montserrat" pitchFamily="34" charset="-122"/>
+                <a:cs typeface="Montserrat" pitchFamily="34" charset="-120"/>
+              </a:rPr>
+              <a:t>Deploy on mobile (Android) using ONNX or TensorFlow Lite.</a:t>
+            </a:r>
+            <a:endParaRPr lang="en-US" sz="1700" dirty="0"/>
+          </a:p>
+        </p:txBody>
+      </p:sp>
+      <p:sp>
+        <p:nvSpPr>
+          <p:cNvPr id="7" name="Text 5"/>
+          <p:cNvSpPr/>
+          <p:nvPr/>
+        </p:nvSpPr>
+        <p:spPr>
+          <a:xfrm>
+            <a:off x="7587139" y="3567113"/>
+            <a:ext cx="2850713" cy="356235"/>
+          </a:xfrm>
+          <a:prstGeom prst="rect">
+            <a:avLst/>
+          </a:prstGeom>
+          <a:noFill/>
+          <a:ln/>
+        </p:spPr>
+        <p:txBody>
+          <a:bodyPr wrap="none" lIns="0" tIns="0" rIns="0" bIns="0" rtlCol="0" anchor="t"/>
+          <a:lstStyle/>
+          <a:p>
+            <a:pPr marL="0" indent="0" algn="l">
+              <a:lnSpc>
+                <a:spcPts val="2800"/>
+              </a:lnSpc>
+              <a:buNone/>
+            </a:pPr>
+            <a:r>
+              <a:rPr lang="en-US" sz="2200" b="1" dirty="0">
+                <a:solidFill>
+                  <a:srgbClr val="2E3C4E"/>
+                </a:solidFill>
+                <a:latin typeface="Barlow Bold" pitchFamily="34" charset="0"/>
+                <a:ea typeface="Barlow Bold" pitchFamily="34" charset="-122"/>
+                <a:cs typeface="Barlow Bold" pitchFamily="34" charset="-120"/>
+              </a:rPr>
+              <a:t>Conclusion</a:t>
+            </a:r>
+            <a:endParaRPr lang="en-US" sz="2200" dirty="0"/>
+          </a:p>
+        </p:txBody>
+      </p:sp>
+      <p:sp>
+        <p:nvSpPr>
+          <p:cNvPr id="8" name="Text 6"/>
+          <p:cNvSpPr/>
+          <p:nvPr/>
+        </p:nvSpPr>
+        <p:spPr>
+          <a:xfrm>
+            <a:off x="7587139" y="4139922"/>
+            <a:ext cx="6292572" cy="693420"/>
+          </a:xfrm>
+          <a:prstGeom prst="rect">
+            <a:avLst/>
+          </a:prstGeom>
+          <a:noFill/>
+          <a:ln/>
+        </p:spPr>
+        <p:txBody>
+          <a:bodyPr wrap="square" lIns="0" tIns="0" rIns="0" bIns="0" rtlCol="0" anchor="t"/>
+          <a:lstStyle/>
+          <a:p>
+            <a:pPr marL="0" indent="0" algn="l">
+              <a:lnSpc>
+                <a:spcPts val="2700"/>
+              </a:lnSpc>
+              <a:buNone/>
+            </a:pPr>
+            <a:r>
+              <a:rPr lang="en-US" sz="1700" b="1" dirty="0">
+                <a:solidFill>
+                  <a:srgbClr val="384653"/>
+                </a:solidFill>
+                <a:latin typeface="Montserrat" pitchFamily="34" charset="0"/>
+                <a:ea typeface="Montserrat" pitchFamily="34" charset="-122"/>
+                <a:cs typeface="Montserrat" pitchFamily="34" charset="-120"/>
+              </a:rPr>
+              <a:t>The Imperative:</a:t>
+            </a:r>
+            <a:r>
+              <a:rPr lang="en-US" sz="1700" dirty="0">
+                <a:solidFill>
+                  <a:srgbClr val="384653"/>
+                </a:solidFill>
+                <a:latin typeface="Montserrat" pitchFamily="34" charset="0"/>
+                <a:ea typeface="Montserrat" pitchFamily="34" charset="-122"/>
+                <a:cs typeface="Montserrat" pitchFamily="34" charset="-120"/>
+              </a:rPr>
+              <a:t> Protecting global health from counterfeit drugs.</a:t>
+            </a:r>
+            <a:endParaRPr lang="en-US" sz="1700" dirty="0"/>
+          </a:p>
+        </p:txBody>
+      </p:sp>
+      <p:sp>
+        <p:nvSpPr>
+          <p:cNvPr id="9" name="Text 7"/>
+          <p:cNvSpPr/>
+          <p:nvPr/>
+        </p:nvSpPr>
+        <p:spPr>
+          <a:xfrm>
+            <a:off x="7587139" y="5028248"/>
+            <a:ext cx="6292572" cy="693420"/>
+          </a:xfrm>
+          <a:prstGeom prst="rect">
+            <a:avLst/>
+          </a:prstGeom>
+          <a:noFill/>
+          <a:ln/>
+        </p:spPr>
+        <p:txBody>
+          <a:bodyPr wrap="square" lIns="0" tIns="0" rIns="0" bIns="0" rtlCol="0" anchor="t"/>
+          <a:lstStyle/>
+          <a:p>
+            <a:pPr marL="0" indent="0" algn="l">
+              <a:lnSpc>
+                <a:spcPts val="2700"/>
+              </a:lnSpc>
+              <a:buNone/>
+            </a:pPr>
+            <a:r>
+              <a:rPr lang="en-US" sz="1700" b="1" dirty="0">
+                <a:solidFill>
+                  <a:srgbClr val="384653"/>
+                </a:solidFill>
+                <a:latin typeface="Montserrat" pitchFamily="34" charset="0"/>
+                <a:ea typeface="Montserrat" pitchFamily="34" charset="-122"/>
+                <a:cs typeface="Montserrat" pitchFamily="34" charset="-120"/>
+              </a:rPr>
+              <a:t>Investment in Innovation:</a:t>
+            </a:r>
+            <a:r>
+              <a:rPr lang="en-US" sz="1700" dirty="0">
+                <a:solidFill>
+                  <a:srgbClr val="384653"/>
+                </a:solidFill>
+                <a:latin typeface="Montserrat" pitchFamily="34" charset="0"/>
+                <a:ea typeface="Montserrat" pitchFamily="34" charset="-122"/>
+                <a:cs typeface="Montserrat" pitchFamily="34" charset="-120"/>
+              </a:rPr>
+              <a:t> Key to a safer, more secure pharmaceutical supply chain.</a:t>
+            </a:r>
+            <a:endParaRPr lang="en-US" sz="1700" dirty="0"/>
+          </a:p>
+        </p:txBody>
+      </p:sp>
+      <p:sp>
+        <p:nvSpPr>
+          <p:cNvPr id="10" name="Rectangle 9">
+            <a:extLst>
+              <a:ext uri="{FF2B5EF4-FFF2-40B4-BE49-F238E27FC236}">
+                <a16:creationId xmlns:a16="http://schemas.microsoft.com/office/drawing/2014/main" id="{34FFC9E9-E906-4B60-A2B7-D9C9E8AD1916}"/>
+              </a:ext>
+            </a:extLst>
+          </p:cNvPr>
+          <p:cNvSpPr/>
+          <p:nvPr/>
+        </p:nvSpPr>
+        <p:spPr>
+          <a:xfrm>
+            <a:off x="12781722" y="7742583"/>
+            <a:ext cx="1848678" cy="487017"/>
+          </a:xfrm>
+          <a:prstGeom prst="rect">
+            <a:avLst/>
+          </a:prstGeom>
+          <a:solidFill>
+            <a:srgbClr val="FFFFFF"/>
+          </a:solidFill>
+          <a:ln>
+            <a:noFill/>
+          </a:ln>
+        </p:spPr>
+        <p:style>
+          <a:lnRef idx="2">
+            <a:schemeClr val="accent1">
+              <a:shade val="50000"/>
+            </a:schemeClr>
+          </a:lnRef>
+          <a:fillRef idx="1">
+            <a:schemeClr val="accent1"/>
+          </a:fillRef>
+          <a:effectRef idx="0">
+            <a:schemeClr val="accent1"/>
+          </a:effectRef>
+          <a:fontRef idx="minor">
+            <a:schemeClr val="lt1"/>
+          </a:fontRef>
+        </p:style>
+        <p:txBody>
+          <a:bodyPr rtlCol="0" anchor="ctr"/>
+          <a:lstStyle/>
+          <a:p>
+            <a:pPr algn="ctr"/>
+            <a:endParaRPr lang="en-US"/>
+          </a:p>
+        </p:txBody>
+      </p:sp>
+    </p:spTree>
+  </p:cSld>
+  <p:clrMapOvr>
+    <a:masterClrMapping/>
+  </p:clrMapOvr>
+</p:sld>
+</file>
+
+<file path=ppt/slides/slide12.xml><?xml version="1.0" encoding="utf-8"?>
 <p:sld xmlns:a="http://schemas.openxmlformats.org/drawingml/2006/main" xmlns:r="http://schemas.openxmlformats.org/officeDocument/2006/relationships" xmlns:p="http://schemas.openxmlformats.org/presentationml/2006/main">
   <p:cSld>
     <p:spTree>
@@ -4563,7 +5128,7 @@
 
 <file path=ppt/slides/slide4.xml><?xml version="1.0" encoding="utf-8"?>
 <p:sld xmlns:a="http://schemas.openxmlformats.org/drawingml/2006/main" xmlns:r="http://schemas.openxmlformats.org/officeDocument/2006/relationships" xmlns:p="http://schemas.openxmlformats.org/presentationml/2006/main">
-  <p:cSld name="Slide 4">
+  <p:cSld>
     <p:spTree>
       <p:nvGrpSpPr>
         <p:cNvPr id="1" name=""/>
@@ -4580,426 +5145,10 @@
       </p:grpSpPr>
       <p:sp>
         <p:nvSpPr>
-          <p:cNvPr id="2" name="Text 0"/>
-          <p:cNvSpPr/>
-          <p:nvPr/>
-        </p:nvSpPr>
-        <p:spPr>
-          <a:xfrm>
-            <a:off x="659249" y="526613"/>
-            <a:ext cx="4957167" cy="619720"/>
-          </a:xfrm>
-          <a:prstGeom prst="rect">
-            <a:avLst/>
-          </a:prstGeom>
-          <a:noFill/>
-          <a:ln/>
-        </p:spPr>
-        <p:txBody>
-          <a:bodyPr wrap="none" lIns="0" tIns="0" rIns="0" bIns="0" rtlCol="0" anchor="t"/>
-          <a:lstStyle/>
-          <a:p>
-            <a:pPr marL="0" indent="0" algn="l">
-              <a:lnSpc>
-                <a:spcPts val="4850"/>
-              </a:lnSpc>
-              <a:buNone/>
-            </a:pPr>
-            <a:r>
-              <a:rPr lang="en-US" sz="3900" b="1" dirty="0">
-                <a:solidFill>
-                  <a:srgbClr val="2E3C4E"/>
-                </a:solidFill>
-                <a:latin typeface="Barlow Bold" pitchFamily="34" charset="0"/>
-                <a:ea typeface="Barlow Bold" pitchFamily="34" charset="-122"/>
-                <a:cs typeface="Barlow Bold" pitchFamily="34" charset="-120"/>
-              </a:rPr>
-              <a:t>Dataset</a:t>
-            </a:r>
-            <a:endParaRPr lang="en-US" sz="3900" dirty="0"/>
-          </a:p>
-        </p:txBody>
-      </p:sp>
-      <p:sp>
-        <p:nvSpPr>
-          <p:cNvPr id="3" name="Text 1"/>
-          <p:cNvSpPr/>
-          <p:nvPr/>
-        </p:nvSpPr>
-        <p:spPr>
-          <a:xfrm>
-            <a:off x="659249" y="1598295"/>
-            <a:ext cx="6426160" cy="602694"/>
-          </a:xfrm>
-          <a:prstGeom prst="rect">
-            <a:avLst/>
-          </a:prstGeom>
-          <a:noFill/>
-          <a:ln/>
-        </p:spPr>
-        <p:txBody>
-          <a:bodyPr wrap="square" lIns="0" tIns="0" rIns="0" bIns="0" rtlCol="0" anchor="t"/>
-          <a:lstStyle/>
-          <a:p>
-            <a:pPr marL="342900" indent="-342900" algn="l">
-              <a:lnSpc>
-                <a:spcPts val="2350"/>
-              </a:lnSpc>
-              <a:buSzPct val="100000"/>
-              <a:buChar char="•"/>
-            </a:pPr>
-            <a:r>
-              <a:rPr lang="en-US" sz="1450" dirty="0">
-                <a:solidFill>
-                  <a:srgbClr val="384653"/>
-                </a:solidFill>
-                <a:latin typeface="Montserrat" pitchFamily="34" charset="0"/>
-                <a:ea typeface="Montserrat" pitchFamily="34" charset="-122"/>
-                <a:cs typeface="Montserrat" pitchFamily="34" charset="-120"/>
-              </a:rPr>
-              <a:t>Our comprehensive dataset was meticulously sourced from </a:t>
-            </a:r>
-            <a:r>
-              <a:rPr lang="en-US" sz="1450" b="1" dirty="0">
-                <a:solidFill>
-                  <a:srgbClr val="384653"/>
-                </a:solidFill>
-                <a:latin typeface="Montserrat" pitchFamily="34" charset="0"/>
-                <a:ea typeface="Montserrat" pitchFamily="34" charset="-122"/>
-                <a:cs typeface="Montserrat" pitchFamily="34" charset="-120"/>
-              </a:rPr>
-              <a:t>Roboflow</a:t>
-            </a:r>
-            <a:r>
-              <a:rPr lang="en-US" sz="1450" dirty="0">
-                <a:solidFill>
-                  <a:srgbClr val="384653"/>
-                </a:solidFill>
-                <a:latin typeface="Montserrat" pitchFamily="34" charset="0"/>
-                <a:ea typeface="Montserrat" pitchFamily="34" charset="-122"/>
-                <a:cs typeface="Montserrat" pitchFamily="34" charset="-120"/>
-              </a:rPr>
-              <a:t>, a platform known for its diverse image collections.</a:t>
-            </a:r>
-            <a:endParaRPr lang="en-US" sz="1450" dirty="0"/>
-          </a:p>
-        </p:txBody>
-      </p:sp>
-      <p:sp>
-        <p:nvSpPr>
-          <p:cNvPr id="4" name="Text 2"/>
-          <p:cNvSpPr/>
-          <p:nvPr/>
-        </p:nvSpPr>
-        <p:spPr>
-          <a:xfrm>
-            <a:off x="659249" y="2266831"/>
-            <a:ext cx="6426160" cy="904042"/>
-          </a:xfrm>
-          <a:prstGeom prst="rect">
-            <a:avLst/>
-          </a:prstGeom>
-          <a:noFill/>
-          <a:ln/>
-        </p:spPr>
-        <p:txBody>
-          <a:bodyPr wrap="square" lIns="0" tIns="0" rIns="0" bIns="0" rtlCol="0" anchor="t"/>
-          <a:lstStyle/>
-          <a:p>
-            <a:pPr marL="342900" indent="-342900" algn="l">
-              <a:lnSpc>
-                <a:spcPts val="2350"/>
-              </a:lnSpc>
-              <a:buSzPct val="100000"/>
-              <a:buChar char="•"/>
-            </a:pPr>
-            <a:r>
-              <a:rPr lang="en-US" sz="1450" dirty="0">
-                <a:solidFill>
-                  <a:srgbClr val="384653"/>
-                </a:solidFill>
-                <a:latin typeface="Montserrat" pitchFamily="34" charset="0"/>
-                <a:ea typeface="Montserrat" pitchFamily="34" charset="-122"/>
-                <a:cs typeface="Montserrat" pitchFamily="34" charset="-120"/>
-              </a:rPr>
-              <a:t>It is specifically curated for capsule detection, featuring 8 distinct classes: 4 representing authentic capsule types and 4 representing their corresponding counterfeit versions.</a:t>
-            </a:r>
-            <a:endParaRPr lang="en-US" sz="1450" dirty="0"/>
-          </a:p>
-        </p:txBody>
-      </p:sp>
-      <p:sp>
-        <p:nvSpPr>
-          <p:cNvPr id="5" name="Text 3"/>
-          <p:cNvSpPr/>
-          <p:nvPr/>
-        </p:nvSpPr>
-        <p:spPr>
-          <a:xfrm>
-            <a:off x="659249" y="3236714"/>
-            <a:ext cx="6426160" cy="301347"/>
-          </a:xfrm>
-          <a:prstGeom prst="rect">
-            <a:avLst/>
-          </a:prstGeom>
-          <a:noFill/>
-          <a:ln/>
-        </p:spPr>
-        <p:txBody>
-          <a:bodyPr wrap="none" lIns="0" tIns="0" rIns="0" bIns="0" rtlCol="0" anchor="t"/>
-          <a:lstStyle/>
-          <a:p>
-            <a:pPr marL="342900" indent="-342900" algn="l">
-              <a:lnSpc>
-                <a:spcPts val="2350"/>
-              </a:lnSpc>
-              <a:buSzPct val="100000"/>
-              <a:buChar char="•"/>
-            </a:pPr>
-            <a:r>
-              <a:rPr lang="en-US" sz="1450" dirty="0">
-                <a:solidFill>
-                  <a:srgbClr val="384653"/>
-                </a:solidFill>
-                <a:latin typeface="Montserrat" pitchFamily="34" charset="0"/>
-                <a:ea typeface="Montserrat" pitchFamily="34" charset="-122"/>
-                <a:cs typeface="Montserrat" pitchFamily="34" charset="-120"/>
-              </a:rPr>
-              <a:t>This rich collection comprises over </a:t>
-            </a:r>
-            <a:r>
-              <a:rPr lang="en-US" sz="1450" b="1" dirty="0">
-                <a:solidFill>
-                  <a:srgbClr val="384653"/>
-                </a:solidFill>
-                <a:latin typeface="Montserrat" pitchFamily="34" charset="0"/>
-                <a:ea typeface="Montserrat" pitchFamily="34" charset="-122"/>
-                <a:cs typeface="Montserrat" pitchFamily="34" charset="-120"/>
-              </a:rPr>
-              <a:t>4,800 annotated images</a:t>
-            </a:r>
-            <a:r>
-              <a:rPr lang="en-US" sz="1450" dirty="0">
-                <a:solidFill>
-                  <a:srgbClr val="384653"/>
-                </a:solidFill>
-                <a:latin typeface="Montserrat" pitchFamily="34" charset="0"/>
-                <a:ea typeface="Montserrat" pitchFamily="34" charset="-122"/>
-                <a:cs typeface="Montserrat" pitchFamily="34" charset="-120"/>
-              </a:rPr>
-              <a:t>.</a:t>
-            </a:r>
-            <a:endParaRPr lang="en-US" sz="1450" dirty="0"/>
-          </a:p>
-        </p:txBody>
-      </p:sp>
-      <p:sp>
-        <p:nvSpPr>
-          <p:cNvPr id="6" name="Text 4"/>
-          <p:cNvSpPr/>
-          <p:nvPr/>
-        </p:nvSpPr>
-        <p:spPr>
-          <a:xfrm>
-            <a:off x="659249" y="3603903"/>
-            <a:ext cx="6426160" cy="1205389"/>
-          </a:xfrm>
-          <a:prstGeom prst="rect">
-            <a:avLst/>
-          </a:prstGeom>
-          <a:noFill/>
-          <a:ln/>
-        </p:spPr>
-        <p:txBody>
-          <a:bodyPr wrap="square" lIns="0" tIns="0" rIns="0" bIns="0" rtlCol="0" anchor="t"/>
-          <a:lstStyle/>
-          <a:p>
-            <a:pPr marL="342900" indent="-342900" algn="l">
-              <a:lnSpc>
-                <a:spcPts val="2350"/>
-              </a:lnSpc>
-              <a:buSzPct val="100000"/>
-              <a:buChar char="•"/>
-            </a:pPr>
-            <a:r>
-              <a:rPr lang="en-US" sz="1450" dirty="0">
-                <a:solidFill>
-                  <a:srgbClr val="384653"/>
-                </a:solidFill>
-                <a:latin typeface="Montserrat" pitchFamily="34" charset="0"/>
-                <a:ea typeface="Montserrat" pitchFamily="34" charset="-122"/>
-                <a:cs typeface="Montserrat" pitchFamily="34" charset="-120"/>
-              </a:rPr>
-              <a:t>The raw data was initially in Pascal VOC format and was meticulously converted to YOLO format, a more efficient and widely adopted standard for real-time object detection models, to streamline our model training and inference processes.</a:t>
-            </a:r>
-            <a:endParaRPr lang="en-US" sz="1450" dirty="0"/>
-          </a:p>
-        </p:txBody>
-      </p:sp>
-      <p:pic>
-        <p:nvPicPr>
-          <p:cNvPr id="7" name="Image 0" descr="preencoded.png"/>
-          <p:cNvPicPr>
-            <a:picLocks noChangeAspect="1"/>
-          </p:cNvPicPr>
-          <p:nvPr/>
-        </p:nvPicPr>
-        <p:blipFill>
-          <a:blip r:embed="rId3"/>
-          <a:stretch>
-            <a:fillRect/>
-          </a:stretch>
-        </p:blipFill>
-        <p:spPr>
-          <a:xfrm>
-            <a:off x="659249" y="4875134"/>
-            <a:ext cx="2521273" cy="2521273"/>
-          </a:xfrm>
-          <a:prstGeom prst="rect">
-            <a:avLst/>
-          </a:prstGeom>
-        </p:spPr>
-      </p:pic>
-      <p:sp>
-        <p:nvSpPr>
-          <p:cNvPr id="8" name="Text 5"/>
-          <p:cNvSpPr/>
-          <p:nvPr/>
-        </p:nvSpPr>
-        <p:spPr>
-          <a:xfrm>
-            <a:off x="7552611" y="1598295"/>
-            <a:ext cx="6426160" cy="904042"/>
-          </a:xfrm>
-          <a:prstGeom prst="rect">
-            <a:avLst/>
-          </a:prstGeom>
-          <a:noFill/>
-          <a:ln/>
-        </p:spPr>
-        <p:txBody>
-          <a:bodyPr wrap="square" lIns="0" tIns="0" rIns="0" bIns="0" rtlCol="0" anchor="t"/>
-          <a:lstStyle/>
-          <a:p>
-            <a:pPr marL="0" indent="0" algn="l">
-              <a:lnSpc>
-                <a:spcPts val="2350"/>
-              </a:lnSpc>
-              <a:buNone/>
-            </a:pPr>
-            <a:r>
-              <a:rPr lang="en-US" sz="1450" dirty="0">
-                <a:solidFill>
-                  <a:srgbClr val="384653"/>
-                </a:solidFill>
-                <a:latin typeface="Montserrat" pitchFamily="34" charset="0"/>
-                <a:ea typeface="Montserrat" pitchFamily="34" charset="-122"/>
-                <a:cs typeface="Montserrat" pitchFamily="34" charset="-120"/>
-              </a:rPr>
-              <a:t>Below are illustrative examples from our dataset, showcasing the subtle visual differences between authentic and counterfeit capsules, which our model is trained to identify:</a:t>
-            </a:r>
-            <a:endParaRPr lang="en-US" sz="1450" dirty="0"/>
-          </a:p>
-        </p:txBody>
-      </p:sp>
-      <p:pic>
-        <p:nvPicPr>
-          <p:cNvPr id="9" name="Image 1"/>
-          <p:cNvPicPr>
-            <a:picLocks noChangeAspect="1"/>
-          </p:cNvPicPr>
-          <p:nvPr/>
-        </p:nvPicPr>
-        <p:blipFill>
-          <a:blip r:embed="rId4"/>
-          <a:srcRect/>
-          <a:stretch/>
-        </p:blipFill>
-        <p:spPr>
-          <a:xfrm>
-            <a:off x="7560231" y="3150420"/>
-            <a:ext cx="3130153" cy="1658872"/>
-          </a:xfrm>
-          <a:prstGeom prst="rect">
-            <a:avLst/>
-          </a:prstGeom>
-        </p:spPr>
-      </p:pic>
-      <p:pic>
-        <p:nvPicPr>
-          <p:cNvPr id="10" name="Image 2"/>
-          <p:cNvPicPr>
-            <a:picLocks noChangeAspect="1"/>
-          </p:cNvPicPr>
-          <p:nvPr/>
-        </p:nvPicPr>
-        <p:blipFill>
-          <a:blip r:embed="rId5"/>
-          <a:srcRect/>
-          <a:stretch/>
-        </p:blipFill>
-        <p:spPr>
-          <a:xfrm>
-            <a:off x="10840998" y="3150420"/>
-            <a:ext cx="3130153" cy="1662893"/>
-          </a:xfrm>
-          <a:prstGeom prst="rect">
-            <a:avLst/>
-          </a:prstGeom>
-        </p:spPr>
-      </p:pic>
-      <p:pic>
-        <p:nvPicPr>
-          <p:cNvPr id="11" name="Image 3"/>
-          <p:cNvPicPr>
-            <a:picLocks noChangeAspect="1"/>
-          </p:cNvPicPr>
-          <p:nvPr/>
-        </p:nvPicPr>
-        <p:blipFill>
-          <a:blip r:embed="rId6"/>
-          <a:srcRect/>
-          <a:stretch/>
-        </p:blipFill>
-        <p:spPr>
-          <a:xfrm>
-            <a:off x="7560231" y="5307910"/>
-            <a:ext cx="2832260" cy="2215174"/>
-          </a:xfrm>
-          <a:prstGeom prst="rect">
-            <a:avLst/>
-          </a:prstGeom>
-        </p:spPr>
-      </p:pic>
-      <p:pic>
-        <p:nvPicPr>
-          <p:cNvPr id="12" name="Image 4"/>
-          <p:cNvPicPr>
-            <a:picLocks noChangeAspect="1"/>
-          </p:cNvPicPr>
-          <p:nvPr/>
-        </p:nvPicPr>
-        <p:blipFill>
-          <a:blip r:embed="rId7"/>
-          <a:srcRect/>
-          <a:stretch/>
-        </p:blipFill>
-        <p:spPr>
-          <a:xfrm>
-            <a:off x="10848618" y="5307910"/>
-            <a:ext cx="3130153" cy="2215174"/>
-          </a:xfrm>
-          <a:prstGeom prst="rect">
-            <a:avLst/>
-          </a:prstGeom>
-        </p:spPr>
-      </p:pic>
-      <p:sp>
-        <p:nvSpPr>
-          <p:cNvPr id="13" name="Rectangle 12">
+          <p:cNvPr id="10" name="Rectangle 9">
             <a:extLst>
               <a:ext uri="{FF2B5EF4-FFF2-40B4-BE49-F238E27FC236}">
-                <a16:creationId xmlns:a16="http://schemas.microsoft.com/office/drawing/2014/main" id="{E13F8EED-A580-4F33-B8B2-E85B8EA8B6AF}"/>
+                <a16:creationId xmlns:a16="http://schemas.microsoft.com/office/drawing/2014/main" id="{34FFC9E9-E906-4B60-A2B7-D9C9E8AD1916}"/>
               </a:ext>
             </a:extLst>
           </p:cNvPr>
@@ -5046,27 +5195,1395 @@
           </a:p>
         </p:txBody>
       </p:sp>
-      <p:sp>
-        <p:nvSpPr>
-          <p:cNvPr id="14" name="Rectangle 13">
+      <p:graphicFrame>
+        <p:nvGraphicFramePr>
+          <p:cNvPr id="12" name="Table 11">
             <a:extLst>
               <a:ext uri="{FF2B5EF4-FFF2-40B4-BE49-F238E27FC236}">
-                <a16:creationId xmlns:a16="http://schemas.microsoft.com/office/drawing/2014/main" id="{39B2D443-5B21-41BD-AECA-2E0D98AC3963}"/>
+                <a16:creationId xmlns:a16="http://schemas.microsoft.com/office/drawing/2014/main" id="{98095C43-71F7-4121-A7E8-AA20A00E0AA3}"/>
               </a:ext>
             </a:extLst>
           </p:cNvPr>
-          <p:cNvSpPr/>
-          <p:nvPr/>
-        </p:nvSpPr>
-        <p:spPr>
-          <a:xfrm>
-            <a:off x="8300500" y="7618886"/>
-            <a:ext cx="1351722" cy="198783"/>
+          <p:cNvGraphicFramePr>
+            <a:graphicFrameLocks noGrp="1"/>
+          </p:cNvGraphicFramePr>
+          <p:nvPr>
+            <p:extLst>
+              <p:ext uri="{D42A27DB-BD31-4B8C-83A1-F6EECF244321}">
+                <p14:modId xmlns:p14="http://schemas.microsoft.com/office/powerpoint/2010/main" val="3493459024"/>
+              </p:ext>
+            </p:extLst>
+          </p:nvPr>
+        </p:nvGraphicFramePr>
+        <p:xfrm>
+          <a:off x="2317128" y="2157586"/>
+          <a:ext cx="9996143" cy="4389120"/>
+        </p:xfrm>
+        <a:graphic>
+          <a:graphicData uri="http://schemas.openxmlformats.org/drawingml/2006/table">
+            <a:tbl>
+              <a:tblPr/>
+              <a:tblGrid>
+                <a:gridCol w="2116510">
+                  <a:extLst>
+                    <a:ext uri="{9D8B030D-6E8A-4147-A177-3AD203B41FA5}">
+                      <a16:colId xmlns:a16="http://schemas.microsoft.com/office/drawing/2014/main" val="2012438592"/>
+                    </a:ext>
+                  </a:extLst>
+                </a:gridCol>
+                <a:gridCol w="2413111">
+                  <a:extLst>
+                    <a:ext uri="{9D8B030D-6E8A-4147-A177-3AD203B41FA5}">
+                      <a16:colId xmlns:a16="http://schemas.microsoft.com/office/drawing/2014/main" val="614958376"/>
+                    </a:ext>
+                  </a:extLst>
+                </a:gridCol>
+                <a:gridCol w="2156791">
+                  <a:extLst>
+                    <a:ext uri="{9D8B030D-6E8A-4147-A177-3AD203B41FA5}">
+                      <a16:colId xmlns:a16="http://schemas.microsoft.com/office/drawing/2014/main" val="2290406443"/>
+                    </a:ext>
+                  </a:extLst>
+                </a:gridCol>
+                <a:gridCol w="2594113">
+                  <a:extLst>
+                    <a:ext uri="{9D8B030D-6E8A-4147-A177-3AD203B41FA5}">
+                      <a16:colId xmlns:a16="http://schemas.microsoft.com/office/drawing/2014/main" val="4266367753"/>
+                    </a:ext>
+                  </a:extLst>
+                </a:gridCol>
+                <a:gridCol w="715618">
+                  <a:extLst>
+                    <a:ext uri="{9D8B030D-6E8A-4147-A177-3AD203B41FA5}">
+                      <a16:colId xmlns:a16="http://schemas.microsoft.com/office/drawing/2014/main" val="3680880345"/>
+                    </a:ext>
+                  </a:extLst>
+                </a:gridCol>
+              </a:tblGrid>
+              <a:tr h="0">
+                <a:tc>
+                  <a:txBody>
+                    <a:bodyPr/>
+                    <a:lstStyle/>
+                    <a:p>
+                      <a:r>
+                        <a:rPr lang="en-US" b="1"/>
+                        <a:t>Study</a:t>
+                      </a:r>
+                      <a:endParaRPr lang="en-US"/>
+                    </a:p>
+                  </a:txBody>
+                  <a:tcPr anchor="ctr">
+                    <a:lnL>
+                      <a:noFill/>
+                    </a:lnL>
+                    <a:lnR>
+                      <a:noFill/>
+                    </a:lnR>
+                    <a:lnT>
+                      <a:noFill/>
+                    </a:lnT>
+                    <a:lnB>
+                      <a:noFill/>
+                    </a:lnB>
+                  </a:tcPr>
+                </a:tc>
+                <a:tc>
+                  <a:txBody>
+                    <a:bodyPr/>
+                    <a:lstStyle/>
+                    <a:p>
+                      <a:r>
+                        <a:rPr lang="en-US" b="1"/>
+                        <a:t>Model / Architecture</a:t>
+                      </a:r>
+                      <a:endParaRPr lang="en-US"/>
+                    </a:p>
+                  </a:txBody>
+                  <a:tcPr anchor="ctr">
+                    <a:lnL>
+                      <a:noFill/>
+                    </a:lnL>
+                    <a:lnR>
+                      <a:noFill/>
+                    </a:lnR>
+                    <a:lnT>
+                      <a:noFill/>
+                    </a:lnT>
+                    <a:lnB>
+                      <a:noFill/>
+                    </a:lnB>
+                  </a:tcPr>
+                </a:tc>
+                <a:tc>
+                  <a:txBody>
+                    <a:bodyPr/>
+                    <a:lstStyle/>
+                    <a:p>
+                      <a:r>
+                        <a:rPr lang="en-US" b="1" dirty="0"/>
+                        <a:t>Task</a:t>
+                      </a:r>
+                      <a:endParaRPr lang="en-US" dirty="0"/>
+                    </a:p>
+                  </a:txBody>
+                  <a:tcPr anchor="ctr">
+                    <a:lnL>
+                      <a:noFill/>
+                    </a:lnL>
+                    <a:lnR>
+                      <a:noFill/>
+                    </a:lnR>
+                    <a:lnT>
+                      <a:noFill/>
+                    </a:lnT>
+                    <a:lnB>
+                      <a:noFill/>
+                    </a:lnB>
+                  </a:tcPr>
+                </a:tc>
+                <a:tc>
+                  <a:txBody>
+                    <a:bodyPr/>
+                    <a:lstStyle/>
+                    <a:p>
+                      <a:r>
+                        <a:rPr lang="en-US" b="1"/>
+                        <a:t>Dataset / Tools</a:t>
+                      </a:r>
+                      <a:endParaRPr lang="en-US"/>
+                    </a:p>
+                  </a:txBody>
+                  <a:tcPr anchor="ctr">
+                    <a:lnL>
+                      <a:noFill/>
+                    </a:lnL>
+                    <a:lnR>
+                      <a:noFill/>
+                    </a:lnR>
+                    <a:lnT>
+                      <a:noFill/>
+                    </a:lnT>
+                    <a:lnB>
+                      <a:noFill/>
+                    </a:lnB>
+                  </a:tcPr>
+                </a:tc>
+                <a:tc>
+                  <a:txBody>
+                    <a:bodyPr/>
+                    <a:lstStyle/>
+                    <a:p>
+                      <a:endParaRPr lang="en-US" dirty="0"/>
+                    </a:p>
+                  </a:txBody>
+                  <a:tcPr anchor="ctr">
+                    <a:lnL>
+                      <a:noFill/>
+                    </a:lnL>
+                    <a:lnR>
+                      <a:noFill/>
+                    </a:lnR>
+                    <a:lnT>
+                      <a:noFill/>
+                    </a:lnT>
+                    <a:lnB>
+                      <a:noFill/>
+                    </a:lnB>
+                  </a:tcPr>
+                </a:tc>
+                <a:extLst>
+                  <a:ext uri="{0D108BD9-81ED-4DB2-BD59-A6C34878D82A}">
+                    <a16:rowId xmlns:a16="http://schemas.microsoft.com/office/drawing/2014/main" val="2986612374"/>
+                  </a:ext>
+                </a:extLst>
+              </a:tr>
+              <a:tr h="0">
+                <a:tc>
+                  <a:txBody>
+                    <a:bodyPr/>
+                    <a:lstStyle/>
+                    <a:p>
+                      <a:r>
+                        <a:rPr lang="da-DK"/>
+                        <a:t>Zhou et al. (2020) [1]</a:t>
+                      </a:r>
+                    </a:p>
+                  </a:txBody>
+                  <a:tcPr anchor="ctr">
+                    <a:lnL>
+                      <a:noFill/>
+                    </a:lnL>
+                    <a:lnR>
+                      <a:noFill/>
+                    </a:lnR>
+                    <a:lnT>
+                      <a:noFill/>
+                    </a:lnT>
+                    <a:lnB>
+                      <a:noFill/>
+                    </a:lnB>
+                  </a:tcPr>
+                </a:tc>
+                <a:tc>
+                  <a:txBody>
+                    <a:bodyPr/>
+                    <a:lstStyle/>
+                    <a:p>
+                      <a:r>
+                        <a:rPr lang="en-US"/>
+                        <a:t>RACNN (Custom CNN with dropout, L2 reg, Adam)</a:t>
+                      </a:r>
+                    </a:p>
+                  </a:txBody>
+                  <a:tcPr anchor="ctr">
+                    <a:lnL>
+                      <a:noFill/>
+                    </a:lnL>
+                    <a:lnR>
+                      <a:noFill/>
+                    </a:lnR>
+                    <a:lnT>
+                      <a:noFill/>
+                    </a:lnT>
+                    <a:lnB>
+                      <a:noFill/>
+                    </a:lnB>
+                  </a:tcPr>
+                </a:tc>
+                <a:tc>
+                  <a:txBody>
+                    <a:bodyPr/>
+                    <a:lstStyle/>
+                    <a:p>
+                      <a:r>
+                        <a:rPr lang="en-US"/>
+                        <a:t>Multi-class defect classification</a:t>
+                      </a:r>
+                    </a:p>
+                  </a:txBody>
+                  <a:tcPr anchor="ctr">
+                    <a:lnL>
+                      <a:noFill/>
+                    </a:lnL>
+                    <a:lnR>
+                      <a:noFill/>
+                    </a:lnR>
+                    <a:lnT>
+                      <a:noFill/>
+                    </a:lnT>
+                    <a:lnB>
+                      <a:noFill/>
+                    </a:lnB>
+                  </a:tcPr>
+                </a:tc>
+                <a:tc>
+                  <a:txBody>
+                    <a:bodyPr/>
+                    <a:lstStyle/>
+                    <a:p>
+                      <a:r>
+                        <a:rPr lang="en-US"/>
+                        <a:t>Capsule production-line images (PyTorch)</a:t>
+                      </a:r>
+                    </a:p>
+                  </a:txBody>
+                  <a:tcPr anchor="ctr">
+                    <a:lnL>
+                      <a:noFill/>
+                    </a:lnL>
+                    <a:lnR>
+                      <a:noFill/>
+                    </a:lnR>
+                    <a:lnT>
+                      <a:noFill/>
+                    </a:lnT>
+                    <a:lnB>
+                      <a:noFill/>
+                    </a:lnB>
+                  </a:tcPr>
+                </a:tc>
+                <a:tc>
+                  <a:txBody>
+                    <a:bodyPr/>
+                    <a:lstStyle/>
+                    <a:p>
+                      <a:endParaRPr lang="en-US" dirty="0"/>
+                    </a:p>
+                  </a:txBody>
+                  <a:tcPr anchor="ctr">
+                    <a:lnL>
+                      <a:noFill/>
+                    </a:lnL>
+                    <a:lnR>
+                      <a:noFill/>
+                    </a:lnR>
+                    <a:lnT>
+                      <a:noFill/>
+                    </a:lnT>
+                    <a:lnB>
+                      <a:noFill/>
+                    </a:lnB>
+                  </a:tcPr>
+                </a:tc>
+                <a:extLst>
+                  <a:ext uri="{0D108BD9-81ED-4DB2-BD59-A6C34878D82A}">
+                    <a16:rowId xmlns:a16="http://schemas.microsoft.com/office/drawing/2014/main" val="3832510023"/>
+                  </a:ext>
+                </a:extLst>
+              </a:tr>
+              <a:tr h="0">
+                <a:tc>
+                  <a:txBody>
+                    <a:bodyPr/>
+                    <a:lstStyle/>
+                    <a:p>
+                      <a:r>
+                        <a:rPr lang="en-US"/>
+                        <a:t>Burgin (2019) [2]</a:t>
+                      </a:r>
+                    </a:p>
+                  </a:txBody>
+                  <a:tcPr anchor="ctr">
+                    <a:lnL>
+                      <a:noFill/>
+                    </a:lnL>
+                    <a:lnR>
+                      <a:noFill/>
+                    </a:lnR>
+                    <a:lnT>
+                      <a:noFill/>
+                    </a:lnT>
+                    <a:lnB>
+                      <a:noFill/>
+                    </a:lnB>
+                  </a:tcPr>
+                </a:tc>
+                <a:tc>
+                  <a:txBody>
+                    <a:bodyPr/>
+                    <a:lstStyle/>
+                    <a:p>
+                      <a:r>
+                        <a:rPr lang="en-US"/>
+                        <a:t>CNN + Superpixel Graph Labeling</a:t>
+                      </a:r>
+                    </a:p>
+                  </a:txBody>
+                  <a:tcPr anchor="ctr">
+                    <a:lnL>
+                      <a:noFill/>
+                    </a:lnL>
+                    <a:lnR>
+                      <a:noFill/>
+                    </a:lnR>
+                    <a:lnT>
+                      <a:noFill/>
+                    </a:lnT>
+                    <a:lnB>
+                      <a:noFill/>
+                    </a:lnB>
+                  </a:tcPr>
+                </a:tc>
+                <a:tc>
+                  <a:txBody>
+                    <a:bodyPr/>
+                    <a:lstStyle/>
+                    <a:p>
+                      <a:r>
+                        <a:rPr lang="en-US"/>
+                        <a:t>Defect localization on tablets</a:t>
+                      </a:r>
+                    </a:p>
+                  </a:txBody>
+                  <a:tcPr anchor="ctr">
+                    <a:lnL>
+                      <a:noFill/>
+                    </a:lnL>
+                    <a:lnR>
+                      <a:noFill/>
+                    </a:lnR>
+                    <a:lnT>
+                      <a:noFill/>
+                    </a:lnT>
+                    <a:lnB>
+                      <a:noFill/>
+                    </a:lnB>
+                  </a:tcPr>
+                </a:tc>
+                <a:tc>
+                  <a:txBody>
+                    <a:bodyPr/>
+                    <a:lstStyle/>
+                    <a:p>
+                      <a:r>
+                        <a:rPr lang="en-US"/>
+                        <a:t>Tablet coating images + graph-based labeling</a:t>
+                      </a:r>
+                    </a:p>
+                  </a:txBody>
+                  <a:tcPr anchor="ctr">
+                    <a:lnL>
+                      <a:noFill/>
+                    </a:lnL>
+                    <a:lnR>
+                      <a:noFill/>
+                    </a:lnR>
+                    <a:lnT>
+                      <a:noFill/>
+                    </a:lnT>
+                    <a:lnB>
+                      <a:noFill/>
+                    </a:lnB>
+                  </a:tcPr>
+                </a:tc>
+                <a:tc>
+                  <a:txBody>
+                    <a:bodyPr/>
+                    <a:lstStyle/>
+                    <a:p>
+                      <a:endParaRPr lang="en-US" dirty="0"/>
+                    </a:p>
+                  </a:txBody>
+                  <a:tcPr anchor="ctr">
+                    <a:lnL>
+                      <a:noFill/>
+                    </a:lnL>
+                    <a:lnR>
+                      <a:noFill/>
+                    </a:lnR>
+                    <a:lnT>
+                      <a:noFill/>
+                    </a:lnT>
+                    <a:lnB>
+                      <a:noFill/>
+                    </a:lnB>
+                  </a:tcPr>
+                </a:tc>
+                <a:extLst>
+                  <a:ext uri="{0D108BD9-81ED-4DB2-BD59-A6C34878D82A}">
+                    <a16:rowId xmlns:a16="http://schemas.microsoft.com/office/drawing/2014/main" val="3179123045"/>
+                  </a:ext>
+                </a:extLst>
+              </a:tr>
+              <a:tr h="0">
+                <a:tc>
+                  <a:txBody>
+                    <a:bodyPr/>
+                    <a:lstStyle/>
+                    <a:p>
+                      <a:r>
+                        <a:rPr lang="en-US"/>
+                        <a:t>Yan (2015) [3]</a:t>
+                      </a:r>
+                    </a:p>
+                  </a:txBody>
+                  <a:tcPr anchor="ctr">
+                    <a:lnL>
+                      <a:noFill/>
+                    </a:lnL>
+                    <a:lnR>
+                      <a:noFill/>
+                    </a:lnR>
+                    <a:lnT>
+                      <a:noFill/>
+                    </a:lnT>
+                    <a:lnB>
+                      <a:noFill/>
+                    </a:lnB>
+                  </a:tcPr>
+                </a:tc>
+                <a:tc>
+                  <a:txBody>
+                    <a:bodyPr/>
+                    <a:lstStyle/>
+                    <a:p>
+                      <a:r>
+                        <a:rPr lang="en-US"/>
+                        <a:t>Random Forest on region-specific features</a:t>
+                      </a:r>
+                    </a:p>
+                  </a:txBody>
+                  <a:tcPr anchor="ctr">
+                    <a:lnL>
+                      <a:noFill/>
+                    </a:lnL>
+                    <a:lnR>
+                      <a:noFill/>
+                    </a:lnR>
+                    <a:lnT>
+                      <a:noFill/>
+                    </a:lnT>
+                    <a:lnB>
+                      <a:noFill/>
+                    </a:lnB>
+                  </a:tcPr>
+                </a:tc>
+                <a:tc>
+                  <a:txBody>
+                    <a:bodyPr/>
+                    <a:lstStyle/>
+                    <a:p>
+                      <a:r>
+                        <a:rPr lang="en-US"/>
+                        <a:t>Region-wise tablet defect analysis</a:t>
+                      </a:r>
+                    </a:p>
+                  </a:txBody>
+                  <a:tcPr anchor="ctr">
+                    <a:lnL>
+                      <a:noFill/>
+                    </a:lnL>
+                    <a:lnR>
+                      <a:noFill/>
+                    </a:lnR>
+                    <a:lnT>
+                      <a:noFill/>
+                    </a:lnT>
+                    <a:lnB>
+                      <a:noFill/>
+                    </a:lnB>
+                  </a:tcPr>
+                </a:tc>
+                <a:tc>
+                  <a:txBody>
+                    <a:bodyPr/>
+                    <a:lstStyle/>
+                    <a:p>
+                      <a:r>
+                        <a:rPr lang="en-US"/>
+                        <a:t>Segmented tablet regions; traditional ML</a:t>
+                      </a:r>
+                    </a:p>
+                  </a:txBody>
+                  <a:tcPr anchor="ctr">
+                    <a:lnL>
+                      <a:noFill/>
+                    </a:lnL>
+                    <a:lnR>
+                      <a:noFill/>
+                    </a:lnR>
+                    <a:lnT>
+                      <a:noFill/>
+                    </a:lnT>
+                    <a:lnB>
+                      <a:noFill/>
+                    </a:lnB>
+                  </a:tcPr>
+                </a:tc>
+                <a:tc>
+                  <a:txBody>
+                    <a:bodyPr/>
+                    <a:lstStyle/>
+                    <a:p>
+                      <a:endParaRPr lang="en-US" dirty="0"/>
+                    </a:p>
+                  </a:txBody>
+                  <a:tcPr anchor="ctr">
+                    <a:lnL>
+                      <a:noFill/>
+                    </a:lnL>
+                    <a:lnR>
+                      <a:noFill/>
+                    </a:lnR>
+                    <a:lnT>
+                      <a:noFill/>
+                    </a:lnT>
+                    <a:lnB>
+                      <a:noFill/>
+                    </a:lnB>
+                  </a:tcPr>
+                </a:tc>
+                <a:extLst>
+                  <a:ext uri="{0D108BD9-81ED-4DB2-BD59-A6C34878D82A}">
+                    <a16:rowId xmlns:a16="http://schemas.microsoft.com/office/drawing/2014/main" val="207222650"/>
+                  </a:ext>
+                </a:extLst>
+              </a:tr>
+              <a:tr h="0">
+                <a:tc>
+                  <a:txBody>
+                    <a:bodyPr/>
+                    <a:lstStyle/>
+                    <a:p>
+                      <a:r>
+                        <a:rPr lang="en-US"/>
+                        <a:t>Motwani (2022) [4]</a:t>
+                      </a:r>
+                    </a:p>
+                  </a:txBody>
+                  <a:tcPr anchor="ctr">
+                    <a:lnL>
+                      <a:noFill/>
+                    </a:lnL>
+                    <a:lnR>
+                      <a:noFill/>
+                    </a:lnR>
+                    <a:lnT>
+                      <a:noFill/>
+                    </a:lnT>
+                    <a:lnB>
+                      <a:noFill/>
+                    </a:lnB>
+                  </a:tcPr>
+                </a:tc>
+                <a:tc>
+                  <a:txBody>
+                    <a:bodyPr/>
+                    <a:lstStyle/>
+                    <a:p>
+                      <a:r>
+                        <a:rPr lang="en-US"/>
+                        <a:t>Fine-tuned VGG16, ResNet50 (Keras/TensorFlow)</a:t>
+                      </a:r>
+                    </a:p>
+                  </a:txBody>
+                  <a:tcPr anchor="ctr">
+                    <a:lnL>
+                      <a:noFill/>
+                    </a:lnL>
+                    <a:lnR>
+                      <a:noFill/>
+                    </a:lnR>
+                    <a:lnT>
+                      <a:noFill/>
+                    </a:lnT>
+                    <a:lnB>
+                      <a:noFill/>
+                    </a:lnB>
+                  </a:tcPr>
+                </a:tc>
+                <a:tc>
+                  <a:txBody>
+                    <a:bodyPr/>
+                    <a:lstStyle/>
+                    <a:p>
+                      <a:r>
+                        <a:rPr lang="en-US"/>
+                        <a:t>Real vs. counterfeit classification</a:t>
+                      </a:r>
+                    </a:p>
+                  </a:txBody>
+                  <a:tcPr anchor="ctr">
+                    <a:lnL>
+                      <a:noFill/>
+                    </a:lnL>
+                    <a:lnR>
+                      <a:noFill/>
+                    </a:lnR>
+                    <a:lnT>
+                      <a:noFill/>
+                    </a:lnT>
+                    <a:lnB>
+                      <a:noFill/>
+                    </a:lnB>
+                  </a:tcPr>
+                </a:tc>
+                <a:tc>
+                  <a:txBody>
+                    <a:bodyPr/>
+                    <a:lstStyle/>
+                    <a:p>
+                      <a:r>
+                        <a:rPr lang="en-US"/>
+                        <a:t>Smartphone images of capsules</a:t>
+                      </a:r>
+                    </a:p>
+                  </a:txBody>
+                  <a:tcPr anchor="ctr">
+                    <a:lnL>
+                      <a:noFill/>
+                    </a:lnL>
+                    <a:lnR>
+                      <a:noFill/>
+                    </a:lnR>
+                    <a:lnT>
+                      <a:noFill/>
+                    </a:lnT>
+                    <a:lnB>
+                      <a:noFill/>
+                    </a:lnB>
+                  </a:tcPr>
+                </a:tc>
+                <a:tc>
+                  <a:txBody>
+                    <a:bodyPr/>
+                    <a:lstStyle/>
+                    <a:p>
+                      <a:endParaRPr lang="en-US" dirty="0"/>
+                    </a:p>
+                  </a:txBody>
+                  <a:tcPr anchor="ctr">
+                    <a:lnL>
+                      <a:noFill/>
+                    </a:lnL>
+                    <a:lnR>
+                      <a:noFill/>
+                    </a:lnR>
+                    <a:lnT>
+                      <a:noFill/>
+                    </a:lnT>
+                    <a:lnB>
+                      <a:noFill/>
+                    </a:lnB>
+                  </a:tcPr>
+                </a:tc>
+                <a:extLst>
+                  <a:ext uri="{0D108BD9-81ED-4DB2-BD59-A6C34878D82A}">
+                    <a16:rowId xmlns:a16="http://schemas.microsoft.com/office/drawing/2014/main" val="2985127055"/>
+                  </a:ext>
+                </a:extLst>
+              </a:tr>
+              <a:tr h="0">
+                <a:tc>
+                  <a:txBody>
+                    <a:bodyPr/>
+                    <a:lstStyle/>
+                    <a:p>
+                      <a:r>
+                        <a:rPr lang="en-US"/>
+                        <a:t>Zhao (2024) [5]</a:t>
+                      </a:r>
+                    </a:p>
+                  </a:txBody>
+                  <a:tcPr anchor="ctr">
+                    <a:lnL>
+                      <a:noFill/>
+                    </a:lnL>
+                    <a:lnR>
+                      <a:noFill/>
+                    </a:lnR>
+                    <a:lnT>
+                      <a:noFill/>
+                    </a:lnT>
+                    <a:lnB>
+                      <a:noFill/>
+                    </a:lnB>
+                  </a:tcPr>
+                </a:tc>
+                <a:tc>
+                  <a:txBody>
+                    <a:bodyPr/>
+                    <a:lstStyle/>
+                    <a:p>
+                      <a:r>
+                        <a:rPr lang="en-US"/>
+                        <a:t>YOLOv5 + MobileNetV3 + SE + CH-SPP</a:t>
+                      </a:r>
+                    </a:p>
+                  </a:txBody>
+                  <a:tcPr anchor="ctr">
+                    <a:lnL>
+                      <a:noFill/>
+                    </a:lnL>
+                    <a:lnR>
+                      <a:noFill/>
+                    </a:lnR>
+                    <a:lnT>
+                      <a:noFill/>
+                    </a:lnT>
+                    <a:lnB>
+                      <a:noFill/>
+                    </a:lnB>
+                  </a:tcPr>
+                </a:tc>
+                <a:tc>
+                  <a:txBody>
+                    <a:bodyPr/>
+                    <a:lstStyle/>
+                    <a:p>
+                      <a:r>
+                        <a:rPr lang="en-US"/>
+                        <a:t>Real-time transparent capsule detection</a:t>
+                      </a:r>
+                    </a:p>
+                  </a:txBody>
+                  <a:tcPr anchor="ctr">
+                    <a:lnL>
+                      <a:noFill/>
+                    </a:lnL>
+                    <a:lnR>
+                      <a:noFill/>
+                    </a:lnR>
+                    <a:lnT>
+                      <a:noFill/>
+                    </a:lnT>
+                    <a:lnB>
+                      <a:noFill/>
+                    </a:lnB>
+                  </a:tcPr>
+                </a:tc>
+                <a:tc>
+                  <a:txBody>
+                    <a:bodyPr/>
+                    <a:lstStyle/>
+                    <a:p>
+                      <a:r>
+                        <a:rPr lang="en-US"/>
+                        <a:t>Custom capsule dataset; PyTorch</a:t>
+                      </a:r>
+                    </a:p>
+                  </a:txBody>
+                  <a:tcPr anchor="ctr">
+                    <a:lnL>
+                      <a:noFill/>
+                    </a:lnL>
+                    <a:lnR>
+                      <a:noFill/>
+                    </a:lnR>
+                    <a:lnT>
+                      <a:noFill/>
+                    </a:lnT>
+                    <a:lnB>
+                      <a:noFill/>
+                    </a:lnB>
+                  </a:tcPr>
+                </a:tc>
+                <a:tc>
+                  <a:txBody>
+                    <a:bodyPr/>
+                    <a:lstStyle/>
+                    <a:p>
+                      <a:endParaRPr lang="en-US" dirty="0"/>
+                    </a:p>
+                  </a:txBody>
+                  <a:tcPr anchor="ctr">
+                    <a:lnL>
+                      <a:noFill/>
+                    </a:lnL>
+                    <a:lnR>
+                      <a:noFill/>
+                    </a:lnR>
+                    <a:lnT>
+                      <a:noFill/>
+                    </a:lnT>
+                    <a:lnB>
+                      <a:noFill/>
+                    </a:lnB>
+                  </a:tcPr>
+                </a:tc>
+                <a:extLst>
+                  <a:ext uri="{0D108BD9-81ED-4DB2-BD59-A6C34878D82A}">
+                    <a16:rowId xmlns:a16="http://schemas.microsoft.com/office/drawing/2014/main" val="3635612140"/>
+                  </a:ext>
+                </a:extLst>
+              </a:tr>
+            </a:tbl>
+          </a:graphicData>
+        </a:graphic>
+      </p:graphicFrame>
+      <p:sp>
+        <p:nvSpPr>
+          <p:cNvPr id="14" name="TextBox 13">
+            <a:extLst>
+              <a:ext uri="{FF2B5EF4-FFF2-40B4-BE49-F238E27FC236}">
+                <a16:creationId xmlns:a16="http://schemas.microsoft.com/office/drawing/2014/main" id="{BF9D5A93-333D-4E12-8260-6F5C4B8C5977}"/>
+              </a:ext>
+            </a:extLst>
+          </p:cNvPr>
+          <p:cNvSpPr txBox="1"/>
+          <p:nvPr/>
+        </p:nvSpPr>
+        <p:spPr>
+          <a:xfrm>
+            <a:off x="1005163" y="1060906"/>
+            <a:ext cx="7315200" cy="584775"/>
           </a:xfrm>
           <a:prstGeom prst="rect">
             <a:avLst/>
           </a:prstGeom>
           <a:noFill/>
+        </p:spPr>
+        <p:txBody>
+          <a:bodyPr wrap="square">
+            <a:spAutoFit/>
+          </a:bodyPr>
+          <a:lstStyle/>
+          <a:p>
+            <a:r>
+              <a:rPr lang="en-US" sz="3200" b="1" dirty="0">
+                <a:solidFill>
+                  <a:srgbClr val="2E3C4E"/>
+                </a:solidFill>
+                <a:latin typeface="Barlow Bold" pitchFamily="34" charset="0"/>
+                <a:ea typeface="Barlow Bold" pitchFamily="34" charset="-122"/>
+                <a:cs typeface="Barlow Bold" pitchFamily="34" charset="-120"/>
+              </a:rPr>
+              <a:t>Literature Review</a:t>
+            </a:r>
+            <a:endParaRPr lang="en-US" sz="3200" dirty="0"/>
+          </a:p>
+        </p:txBody>
+      </p:sp>
+    </p:spTree>
+    <p:extLst>
+      <p:ext uri="{BB962C8B-B14F-4D97-AF65-F5344CB8AC3E}">
+        <p14:creationId xmlns:p14="http://schemas.microsoft.com/office/powerpoint/2010/main" val="78290344"/>
+      </p:ext>
+    </p:extLst>
+  </p:cSld>
+  <p:clrMapOvr>
+    <a:masterClrMapping/>
+  </p:clrMapOvr>
+</p:sld>
+</file>
+
+<file path=ppt/slides/slide5.xml><?xml version="1.0" encoding="utf-8"?>
+<p:sld xmlns:a="http://schemas.openxmlformats.org/drawingml/2006/main" xmlns:r="http://schemas.openxmlformats.org/officeDocument/2006/relationships" xmlns:p="http://schemas.openxmlformats.org/presentationml/2006/main">
+  <p:cSld name="Slide 4">
+    <p:spTree>
+      <p:nvGrpSpPr>
+        <p:cNvPr id="1" name=""/>
+        <p:cNvGrpSpPr/>
+        <p:nvPr/>
+      </p:nvGrpSpPr>
+      <p:grpSpPr>
+        <a:xfrm>
+          <a:off x="0" y="0"/>
+          <a:ext cx="0" cy="0"/>
+          <a:chOff x="0" y="0"/>
+          <a:chExt cx="0" cy="0"/>
+        </a:xfrm>
+      </p:grpSpPr>
+      <p:sp>
+        <p:nvSpPr>
+          <p:cNvPr id="2" name="Text 0"/>
+          <p:cNvSpPr/>
+          <p:nvPr/>
+        </p:nvSpPr>
+        <p:spPr>
+          <a:xfrm>
+            <a:off x="659249" y="526613"/>
+            <a:ext cx="4957167" cy="619720"/>
+          </a:xfrm>
+          <a:prstGeom prst="rect">
+            <a:avLst/>
+          </a:prstGeom>
+          <a:noFill/>
+          <a:ln/>
+        </p:spPr>
+        <p:txBody>
+          <a:bodyPr wrap="none" lIns="0" tIns="0" rIns="0" bIns="0" rtlCol="0" anchor="t"/>
+          <a:lstStyle/>
+          <a:p>
+            <a:pPr marL="0" indent="0" algn="l">
+              <a:lnSpc>
+                <a:spcPts val="4850"/>
+              </a:lnSpc>
+              <a:buNone/>
+            </a:pPr>
+            <a:r>
+              <a:rPr lang="en-US" sz="3900" b="1" dirty="0">
+                <a:solidFill>
+                  <a:srgbClr val="2E3C4E"/>
+                </a:solidFill>
+                <a:latin typeface="Barlow Bold" pitchFamily="34" charset="0"/>
+                <a:ea typeface="Barlow Bold" pitchFamily="34" charset="-122"/>
+                <a:cs typeface="Barlow Bold" pitchFamily="34" charset="-120"/>
+              </a:rPr>
+              <a:t>Dataset</a:t>
+            </a:r>
+            <a:endParaRPr lang="en-US" sz="3900" dirty="0"/>
+          </a:p>
+        </p:txBody>
+      </p:sp>
+      <p:sp>
+        <p:nvSpPr>
+          <p:cNvPr id="3" name="Text 1"/>
+          <p:cNvSpPr/>
+          <p:nvPr/>
+        </p:nvSpPr>
+        <p:spPr>
+          <a:xfrm>
+            <a:off x="659249" y="1598295"/>
+            <a:ext cx="6426160" cy="602694"/>
+          </a:xfrm>
+          <a:prstGeom prst="rect">
+            <a:avLst/>
+          </a:prstGeom>
+          <a:noFill/>
+          <a:ln/>
+        </p:spPr>
+        <p:txBody>
+          <a:bodyPr wrap="square" lIns="0" tIns="0" rIns="0" bIns="0" rtlCol="0" anchor="t"/>
+          <a:lstStyle/>
+          <a:p>
+            <a:pPr marL="342900" indent="-342900" algn="l">
+              <a:lnSpc>
+                <a:spcPts val="2350"/>
+              </a:lnSpc>
+              <a:buSzPct val="100000"/>
+              <a:buChar char="•"/>
+            </a:pPr>
+            <a:r>
+              <a:rPr lang="en-US" sz="1450" dirty="0">
+                <a:solidFill>
+                  <a:srgbClr val="384653"/>
+                </a:solidFill>
+                <a:latin typeface="Montserrat" pitchFamily="34" charset="0"/>
+                <a:ea typeface="Montserrat" pitchFamily="34" charset="-122"/>
+                <a:cs typeface="Montserrat" pitchFamily="34" charset="-120"/>
+              </a:rPr>
+              <a:t>Our comprehensive dataset was meticulously sourced from </a:t>
+            </a:r>
+            <a:r>
+              <a:rPr lang="en-US" sz="1450" b="1" dirty="0">
+                <a:solidFill>
+                  <a:srgbClr val="384653"/>
+                </a:solidFill>
+                <a:latin typeface="Montserrat" pitchFamily="34" charset="0"/>
+                <a:ea typeface="Montserrat" pitchFamily="34" charset="-122"/>
+                <a:cs typeface="Montserrat" pitchFamily="34" charset="-120"/>
+              </a:rPr>
+              <a:t>Roboflow</a:t>
+            </a:r>
+            <a:r>
+              <a:rPr lang="en-US" sz="1450" dirty="0">
+                <a:solidFill>
+                  <a:srgbClr val="384653"/>
+                </a:solidFill>
+                <a:latin typeface="Montserrat" pitchFamily="34" charset="0"/>
+                <a:ea typeface="Montserrat" pitchFamily="34" charset="-122"/>
+                <a:cs typeface="Montserrat" pitchFamily="34" charset="-120"/>
+              </a:rPr>
+              <a:t>, a platform known for its diverse image collections.</a:t>
+            </a:r>
+            <a:endParaRPr lang="en-US" sz="1450" dirty="0"/>
+          </a:p>
+        </p:txBody>
+      </p:sp>
+      <p:sp>
+        <p:nvSpPr>
+          <p:cNvPr id="4" name="Text 2"/>
+          <p:cNvSpPr/>
+          <p:nvPr/>
+        </p:nvSpPr>
+        <p:spPr>
+          <a:xfrm>
+            <a:off x="659249" y="2266831"/>
+            <a:ext cx="6426160" cy="904042"/>
+          </a:xfrm>
+          <a:prstGeom prst="rect">
+            <a:avLst/>
+          </a:prstGeom>
+          <a:noFill/>
+          <a:ln/>
+        </p:spPr>
+        <p:txBody>
+          <a:bodyPr wrap="square" lIns="0" tIns="0" rIns="0" bIns="0" rtlCol="0" anchor="t"/>
+          <a:lstStyle/>
+          <a:p>
+            <a:pPr marL="342900" indent="-342900" algn="l">
+              <a:lnSpc>
+                <a:spcPts val="2350"/>
+              </a:lnSpc>
+              <a:buSzPct val="100000"/>
+              <a:buChar char="•"/>
+            </a:pPr>
+            <a:r>
+              <a:rPr lang="en-US" sz="1450" dirty="0">
+                <a:solidFill>
+                  <a:srgbClr val="384653"/>
+                </a:solidFill>
+                <a:latin typeface="Montserrat" pitchFamily="34" charset="0"/>
+                <a:ea typeface="Montserrat" pitchFamily="34" charset="-122"/>
+                <a:cs typeface="Montserrat" pitchFamily="34" charset="-120"/>
+              </a:rPr>
+              <a:t>It is specifically curated for capsule detection, featuring 8 distinct classes: 4 representing authentic capsule types and 4 representing their corresponding counterfeit versions.</a:t>
+            </a:r>
+            <a:endParaRPr lang="en-US" sz="1450" dirty="0"/>
+          </a:p>
+        </p:txBody>
+      </p:sp>
+      <p:sp>
+        <p:nvSpPr>
+          <p:cNvPr id="5" name="Text 3"/>
+          <p:cNvSpPr/>
+          <p:nvPr/>
+        </p:nvSpPr>
+        <p:spPr>
+          <a:xfrm>
+            <a:off x="659249" y="3236714"/>
+            <a:ext cx="6426160" cy="301347"/>
+          </a:xfrm>
+          <a:prstGeom prst="rect">
+            <a:avLst/>
+          </a:prstGeom>
+          <a:noFill/>
+          <a:ln/>
+        </p:spPr>
+        <p:txBody>
+          <a:bodyPr wrap="none" lIns="0" tIns="0" rIns="0" bIns="0" rtlCol="0" anchor="t"/>
+          <a:lstStyle/>
+          <a:p>
+            <a:pPr marL="342900" indent="-342900" algn="l">
+              <a:lnSpc>
+                <a:spcPts val="2350"/>
+              </a:lnSpc>
+              <a:buSzPct val="100000"/>
+              <a:buChar char="•"/>
+            </a:pPr>
+            <a:r>
+              <a:rPr lang="en-US" sz="1450" dirty="0">
+                <a:solidFill>
+                  <a:srgbClr val="384653"/>
+                </a:solidFill>
+                <a:latin typeface="Montserrat" pitchFamily="34" charset="0"/>
+                <a:ea typeface="Montserrat" pitchFamily="34" charset="-122"/>
+                <a:cs typeface="Montserrat" pitchFamily="34" charset="-120"/>
+              </a:rPr>
+              <a:t>This rich collection comprises over </a:t>
+            </a:r>
+            <a:r>
+              <a:rPr lang="en-US" sz="1450" b="1" dirty="0">
+                <a:solidFill>
+                  <a:srgbClr val="384653"/>
+                </a:solidFill>
+                <a:latin typeface="Montserrat" pitchFamily="34" charset="0"/>
+                <a:ea typeface="Montserrat" pitchFamily="34" charset="-122"/>
+                <a:cs typeface="Montserrat" pitchFamily="34" charset="-120"/>
+              </a:rPr>
+              <a:t>4,800 annotated images</a:t>
+            </a:r>
+            <a:r>
+              <a:rPr lang="en-US" sz="1450" dirty="0">
+                <a:solidFill>
+                  <a:srgbClr val="384653"/>
+                </a:solidFill>
+                <a:latin typeface="Montserrat" pitchFamily="34" charset="0"/>
+                <a:ea typeface="Montserrat" pitchFamily="34" charset="-122"/>
+                <a:cs typeface="Montserrat" pitchFamily="34" charset="-120"/>
+              </a:rPr>
+              <a:t>.</a:t>
+            </a:r>
+            <a:endParaRPr lang="en-US" sz="1450" dirty="0"/>
+          </a:p>
+        </p:txBody>
+      </p:sp>
+      <p:sp>
+        <p:nvSpPr>
+          <p:cNvPr id="6" name="Text 4"/>
+          <p:cNvSpPr/>
+          <p:nvPr/>
+        </p:nvSpPr>
+        <p:spPr>
+          <a:xfrm>
+            <a:off x="659249" y="3603903"/>
+            <a:ext cx="6426160" cy="1205389"/>
+          </a:xfrm>
+          <a:prstGeom prst="rect">
+            <a:avLst/>
+          </a:prstGeom>
+          <a:noFill/>
+          <a:ln/>
+        </p:spPr>
+        <p:txBody>
+          <a:bodyPr wrap="square" lIns="0" tIns="0" rIns="0" bIns="0" rtlCol="0" anchor="t"/>
+          <a:lstStyle/>
+          <a:p>
+            <a:pPr marL="342900" indent="-342900" algn="l">
+              <a:lnSpc>
+                <a:spcPts val="2350"/>
+              </a:lnSpc>
+              <a:buSzPct val="100000"/>
+              <a:buChar char="•"/>
+            </a:pPr>
+            <a:r>
+              <a:rPr lang="en-US" sz="1450" dirty="0">
+                <a:solidFill>
+                  <a:srgbClr val="384653"/>
+                </a:solidFill>
+                <a:latin typeface="Montserrat" pitchFamily="34" charset="0"/>
+                <a:ea typeface="Montserrat" pitchFamily="34" charset="-122"/>
+                <a:cs typeface="Montserrat" pitchFamily="34" charset="-120"/>
+              </a:rPr>
+              <a:t>The raw data was initially in Pascal VOC format and was meticulously converted to YOLO format, a more efficient and widely adopted standard for real-time object detection models, to streamline our model training and inference processes.</a:t>
+            </a:r>
+            <a:endParaRPr lang="en-US" sz="1450" dirty="0"/>
+          </a:p>
+        </p:txBody>
+      </p:sp>
+      <p:pic>
+        <p:nvPicPr>
+          <p:cNvPr id="7" name="Image 0" descr="preencoded.png"/>
+          <p:cNvPicPr>
+            <a:picLocks noChangeAspect="1"/>
+          </p:cNvPicPr>
+          <p:nvPr/>
+        </p:nvPicPr>
+        <p:blipFill>
+          <a:blip r:embed="rId3"/>
+          <a:stretch>
+            <a:fillRect/>
+          </a:stretch>
+        </p:blipFill>
+        <p:spPr>
+          <a:xfrm>
+            <a:off x="659249" y="4875134"/>
+            <a:ext cx="2521273" cy="2521273"/>
+          </a:xfrm>
+          <a:prstGeom prst="rect">
+            <a:avLst/>
+          </a:prstGeom>
+        </p:spPr>
+      </p:pic>
+      <p:sp>
+        <p:nvSpPr>
+          <p:cNvPr id="8" name="Text 5"/>
+          <p:cNvSpPr/>
+          <p:nvPr/>
+        </p:nvSpPr>
+        <p:spPr>
+          <a:xfrm>
+            <a:off x="7552611" y="1598295"/>
+            <a:ext cx="6426160" cy="904042"/>
+          </a:xfrm>
+          <a:prstGeom prst="rect">
+            <a:avLst/>
+          </a:prstGeom>
+          <a:noFill/>
+          <a:ln/>
+        </p:spPr>
+        <p:txBody>
+          <a:bodyPr wrap="square" lIns="0" tIns="0" rIns="0" bIns="0" rtlCol="0" anchor="t"/>
+          <a:lstStyle/>
+          <a:p>
+            <a:pPr marL="0" indent="0" algn="l">
+              <a:lnSpc>
+                <a:spcPts val="2350"/>
+              </a:lnSpc>
+              <a:buNone/>
+            </a:pPr>
+            <a:r>
+              <a:rPr lang="en-US" sz="1450" dirty="0">
+                <a:solidFill>
+                  <a:srgbClr val="384653"/>
+                </a:solidFill>
+                <a:latin typeface="Montserrat" pitchFamily="34" charset="0"/>
+                <a:ea typeface="Montserrat" pitchFamily="34" charset="-122"/>
+                <a:cs typeface="Montserrat" pitchFamily="34" charset="-120"/>
+              </a:rPr>
+              <a:t>Below are illustrative examples from our dataset, showcasing the subtle visual differences between authentic and counterfeit capsules, which our model is trained to identify:</a:t>
+            </a:r>
+            <a:endParaRPr lang="en-US" sz="1450" dirty="0"/>
+          </a:p>
+        </p:txBody>
+      </p:sp>
+      <p:pic>
+        <p:nvPicPr>
+          <p:cNvPr id="9" name="Image 1"/>
+          <p:cNvPicPr>
+            <a:picLocks noChangeAspect="1"/>
+          </p:cNvPicPr>
+          <p:nvPr/>
+        </p:nvPicPr>
+        <p:blipFill>
+          <a:blip r:embed="rId4"/>
+          <a:srcRect/>
+          <a:stretch/>
+        </p:blipFill>
+        <p:spPr>
+          <a:xfrm>
+            <a:off x="7560231" y="3150420"/>
+            <a:ext cx="3130153" cy="1658872"/>
+          </a:xfrm>
+          <a:prstGeom prst="rect">
+            <a:avLst/>
+          </a:prstGeom>
+        </p:spPr>
+      </p:pic>
+      <p:pic>
+        <p:nvPicPr>
+          <p:cNvPr id="10" name="Image 2"/>
+          <p:cNvPicPr>
+            <a:picLocks noChangeAspect="1"/>
+          </p:cNvPicPr>
+          <p:nvPr/>
+        </p:nvPicPr>
+        <p:blipFill>
+          <a:blip r:embed="rId5"/>
+          <a:srcRect/>
+          <a:stretch/>
+        </p:blipFill>
+        <p:spPr>
+          <a:xfrm>
+            <a:off x="10840998" y="3150420"/>
+            <a:ext cx="3130153" cy="1662893"/>
+          </a:xfrm>
+          <a:prstGeom prst="rect">
+            <a:avLst/>
+          </a:prstGeom>
+        </p:spPr>
+      </p:pic>
+      <p:pic>
+        <p:nvPicPr>
+          <p:cNvPr id="11" name="Image 3"/>
+          <p:cNvPicPr>
+            <a:picLocks noChangeAspect="1"/>
+          </p:cNvPicPr>
+          <p:nvPr/>
+        </p:nvPicPr>
+        <p:blipFill>
+          <a:blip r:embed="rId6"/>
+          <a:srcRect/>
+          <a:stretch/>
+        </p:blipFill>
+        <p:spPr>
+          <a:xfrm>
+            <a:off x="7560231" y="5307910"/>
+            <a:ext cx="2832260" cy="2215174"/>
+          </a:xfrm>
+          <a:prstGeom prst="rect">
+            <a:avLst/>
+          </a:prstGeom>
+        </p:spPr>
+      </p:pic>
+      <p:pic>
+        <p:nvPicPr>
+          <p:cNvPr id="12" name="Image 4"/>
+          <p:cNvPicPr>
+            <a:picLocks noChangeAspect="1"/>
+          </p:cNvPicPr>
+          <p:nvPr/>
+        </p:nvPicPr>
+        <p:blipFill>
+          <a:blip r:embed="rId7"/>
+          <a:srcRect/>
+          <a:stretch/>
+        </p:blipFill>
+        <p:spPr>
+          <a:xfrm>
+            <a:off x="10848618" y="5307910"/>
+            <a:ext cx="3130153" cy="2215174"/>
+          </a:xfrm>
+          <a:prstGeom prst="rect">
+            <a:avLst/>
+          </a:prstGeom>
+        </p:spPr>
+      </p:pic>
+      <p:sp>
+        <p:nvSpPr>
+          <p:cNvPr id="13" name="Rectangle 12">
+            <a:extLst>
+              <a:ext uri="{FF2B5EF4-FFF2-40B4-BE49-F238E27FC236}">
+                <a16:creationId xmlns:a16="http://schemas.microsoft.com/office/drawing/2014/main" id="{E13F8EED-A580-4F33-B8B2-E85B8EA8B6AF}"/>
+              </a:ext>
+            </a:extLst>
+          </p:cNvPr>
+          <p:cNvSpPr/>
+          <p:nvPr/>
+        </p:nvSpPr>
+        <p:spPr>
+          <a:xfrm>
+            <a:off x="12781722" y="7742583"/>
+            <a:ext cx="1848678" cy="487017"/>
+          </a:xfrm>
+          <a:prstGeom prst="rect">
+            <a:avLst/>
+          </a:prstGeom>
+          <a:solidFill>
+            <a:srgbClr val="FFFFFF"/>
+          </a:solidFill>
           <a:ln>
             <a:noFill/>
           </a:ln>
@@ -5092,23 +6609,16 @@
           <a:lstStyle/>
           <a:p>
             <a:pPr algn="ctr"/>
-            <a:r>
-              <a:rPr lang="en-US" dirty="0">
-                <a:solidFill>
-                  <a:schemeClr val="tx1"/>
-                </a:solidFill>
-              </a:rPr>
-              <a:t>Authentic</a:t>
-            </a:r>
-          </a:p>
-        </p:txBody>
-      </p:sp>
-      <p:sp>
-        <p:nvSpPr>
-          <p:cNvPr id="15" name="Rectangle 14">
+            <a:endParaRPr lang="en-US"/>
+          </a:p>
+        </p:txBody>
+      </p:sp>
+      <p:sp>
+        <p:nvSpPr>
+          <p:cNvPr id="14" name="Rectangle 13">
             <a:extLst>
               <a:ext uri="{FF2B5EF4-FFF2-40B4-BE49-F238E27FC236}">
-                <a16:creationId xmlns:a16="http://schemas.microsoft.com/office/drawing/2014/main" id="{58BCD937-C89C-42F7-A663-988405CE9AD6}"/>
+                <a16:creationId xmlns:a16="http://schemas.microsoft.com/office/drawing/2014/main" id="{39B2D443-5B21-41BD-AECA-2E0D98AC3963}"/>
               </a:ext>
             </a:extLst>
           </p:cNvPr>
@@ -5117,7 +6627,7 @@
         </p:nvSpPr>
         <p:spPr>
           <a:xfrm>
-            <a:off x="8449446" y="4886315"/>
+            <a:off x="8300500" y="7618886"/>
             <a:ext cx="1351722" cy="198783"/>
           </a:xfrm>
           <a:prstGeom prst="rect">
@@ -5162,10 +6672,10 @@
       </p:sp>
       <p:sp>
         <p:nvSpPr>
-          <p:cNvPr id="16" name="Rectangle 15">
+          <p:cNvPr id="15" name="Rectangle 14">
             <a:extLst>
               <a:ext uri="{FF2B5EF4-FFF2-40B4-BE49-F238E27FC236}">
-                <a16:creationId xmlns:a16="http://schemas.microsoft.com/office/drawing/2014/main" id="{CD9C742C-FD7F-4BFB-AE50-F190D28C1825}"/>
+                <a16:creationId xmlns:a16="http://schemas.microsoft.com/office/drawing/2014/main" id="{58BCD937-C89C-42F7-A663-988405CE9AD6}"/>
               </a:ext>
             </a:extLst>
           </p:cNvPr>
@@ -5174,7 +6684,7 @@
         </p:nvSpPr>
         <p:spPr>
           <a:xfrm>
-            <a:off x="11730213" y="4886314"/>
+            <a:off x="8449446" y="4886315"/>
             <a:ext cx="1351722" cy="198783"/>
           </a:xfrm>
           <a:prstGeom prst="rect">
@@ -5212,17 +6722,17 @@
                   <a:schemeClr val="tx1"/>
                 </a:solidFill>
               </a:rPr>
-              <a:t>Counterfeit</a:t>
-            </a:r>
-          </a:p>
-        </p:txBody>
-      </p:sp>
-      <p:sp>
-        <p:nvSpPr>
-          <p:cNvPr id="17" name="Rectangle 16">
+              <a:t>Authentic</a:t>
+            </a:r>
+          </a:p>
+        </p:txBody>
+      </p:sp>
+      <p:sp>
+        <p:nvSpPr>
+          <p:cNvPr id="16" name="Rectangle 15">
             <a:extLst>
               <a:ext uri="{FF2B5EF4-FFF2-40B4-BE49-F238E27FC236}">
-                <a16:creationId xmlns:a16="http://schemas.microsoft.com/office/drawing/2014/main" id="{11FDFD50-F476-443A-A2A7-B025C87E3A00}"/>
+                <a16:creationId xmlns:a16="http://schemas.microsoft.com/office/drawing/2014/main" id="{CD9C742C-FD7F-4BFB-AE50-F190D28C1825}"/>
               </a:ext>
             </a:extLst>
           </p:cNvPr>
@@ -5231,7 +6741,7 @@
         </p:nvSpPr>
         <p:spPr>
           <a:xfrm>
-            <a:off x="11737833" y="7618886"/>
+            <a:off x="11730213" y="4886314"/>
             <a:ext cx="1351722" cy="198783"/>
           </a:xfrm>
           <a:prstGeom prst="rect">
@@ -5274,6 +6784,63 @@
           </a:p>
         </p:txBody>
       </p:sp>
+      <p:sp>
+        <p:nvSpPr>
+          <p:cNvPr id="17" name="Rectangle 16">
+            <a:extLst>
+              <a:ext uri="{FF2B5EF4-FFF2-40B4-BE49-F238E27FC236}">
+                <a16:creationId xmlns:a16="http://schemas.microsoft.com/office/drawing/2014/main" id="{11FDFD50-F476-443A-A2A7-B025C87E3A00}"/>
+              </a:ext>
+            </a:extLst>
+          </p:cNvPr>
+          <p:cNvSpPr/>
+          <p:nvPr/>
+        </p:nvSpPr>
+        <p:spPr>
+          <a:xfrm>
+            <a:off x="11737833" y="7618886"/>
+            <a:ext cx="1351722" cy="198783"/>
+          </a:xfrm>
+          <a:prstGeom prst="rect">
+            <a:avLst/>
+          </a:prstGeom>
+          <a:noFill/>
+          <a:ln>
+            <a:noFill/>
+          </a:ln>
+        </p:spPr>
+        <p:style>
+          <a:lnRef idx="2">
+            <a:schemeClr val="accent1">
+              <a:shade val="50000"/>
+            </a:schemeClr>
+          </a:lnRef>
+          <a:fillRef idx="1">
+            <a:schemeClr val="accent1"/>
+          </a:fillRef>
+          <a:effectRef idx="0">
+            <a:schemeClr val="accent1"/>
+          </a:effectRef>
+          <a:fontRef idx="minor">
+            <a:schemeClr val="lt1"/>
+          </a:fontRef>
+        </p:style>
+        <p:txBody>
+          <a:bodyPr rtlCol="0" anchor="ctr"/>
+          <a:lstStyle/>
+          <a:p>
+            <a:pPr algn="ctr"/>
+            <a:r>
+              <a:rPr lang="en-US" dirty="0">
+                <a:solidFill>
+                  <a:schemeClr val="tx1"/>
+                </a:solidFill>
+              </a:rPr>
+              <a:t>Counterfeit</a:t>
+            </a:r>
+          </a:p>
+        </p:txBody>
+      </p:sp>
     </p:spTree>
   </p:cSld>
   <p:clrMapOvr>
@@ -5282,7 +6849,7 @@
 </p:sld>
 </file>
 
-<file path=ppt/slides/slide5.xml><?xml version="1.0" encoding="utf-8"?>
+<file path=ppt/slides/slide6.xml><?xml version="1.0" encoding="utf-8"?>
 <p:sld xmlns:a="http://schemas.openxmlformats.org/drawingml/2006/main" xmlns:r="http://schemas.openxmlformats.org/officeDocument/2006/relationships" xmlns:p="http://schemas.openxmlformats.org/presentationml/2006/main">
   <p:cSld name="Slide 5">
     <p:spTree>
@@ -5869,7 +7436,7 @@
 </p:sld>
 </file>
 
-<file path=ppt/slides/slide6.xml><?xml version="1.0" encoding="utf-8"?>
+<file path=ppt/slides/slide7.xml><?xml version="1.0" encoding="utf-8"?>
 <p:sld xmlns:a="http://schemas.openxmlformats.org/drawingml/2006/main" xmlns:r="http://schemas.openxmlformats.org/officeDocument/2006/relationships" xmlns:p="http://schemas.openxmlformats.org/presentationml/2006/main">
   <p:cSld name="Slide 6">
     <p:spTree>
@@ -6440,7 +8007,7 @@
 </p:sld>
 </file>
 
-<file path=ppt/slides/slide7.xml><?xml version="1.0" encoding="utf-8"?>
+<file path=ppt/slides/slide8.xml><?xml version="1.0" encoding="utf-8"?>
 <p:sld xmlns:a="http://schemas.openxmlformats.org/drawingml/2006/main" xmlns:r="http://schemas.openxmlformats.org/officeDocument/2006/relationships" xmlns:p="http://schemas.openxmlformats.org/presentationml/2006/main">
   <p:cSld name="Slide 7">
     <p:spTree>
@@ -7015,7 +8582,7 @@
 </p:sld>
 </file>
 
-<file path=ppt/slides/slide8.xml><?xml version="1.0" encoding="utf-8"?>
+<file path=ppt/slides/slide9.xml><?xml version="1.0" encoding="utf-8"?>
 <p:sld xmlns:a="http://schemas.openxmlformats.org/drawingml/2006/main" xmlns:r="http://schemas.openxmlformats.org/officeDocument/2006/relationships" xmlns:p="http://schemas.openxmlformats.org/presentationml/2006/main">
   <p:cSld name="Slide 8">
     <p:spTree>
@@ -7362,482 +8929,6 @@
             <a:extLst>
               <a:ext uri="{FF2B5EF4-FFF2-40B4-BE49-F238E27FC236}">
                 <a16:creationId xmlns:a16="http://schemas.microsoft.com/office/drawing/2014/main" id="{32AC2762-D069-41DC-B525-82A4BFEA81DC}"/>
-              </a:ext>
-            </a:extLst>
-          </p:cNvPr>
-          <p:cNvSpPr/>
-          <p:nvPr/>
-        </p:nvSpPr>
-        <p:spPr>
-          <a:xfrm>
-            <a:off x="12781722" y="7742583"/>
-            <a:ext cx="1848678" cy="487017"/>
-          </a:xfrm>
-          <a:prstGeom prst="rect">
-            <a:avLst/>
-          </a:prstGeom>
-          <a:solidFill>
-            <a:srgbClr val="FFFFFF"/>
-          </a:solidFill>
-          <a:ln>
-            <a:noFill/>
-          </a:ln>
-        </p:spPr>
-        <p:style>
-          <a:lnRef idx="2">
-            <a:schemeClr val="accent1">
-              <a:shade val="50000"/>
-            </a:schemeClr>
-          </a:lnRef>
-          <a:fillRef idx="1">
-            <a:schemeClr val="accent1"/>
-          </a:fillRef>
-          <a:effectRef idx="0">
-            <a:schemeClr val="accent1"/>
-          </a:effectRef>
-          <a:fontRef idx="minor">
-            <a:schemeClr val="lt1"/>
-          </a:fontRef>
-        </p:style>
-        <p:txBody>
-          <a:bodyPr rtlCol="0" anchor="ctr"/>
-          <a:lstStyle/>
-          <a:p>
-            <a:pPr algn="ctr"/>
-            <a:endParaRPr lang="en-US"/>
-          </a:p>
-        </p:txBody>
-      </p:sp>
-    </p:spTree>
-  </p:cSld>
-  <p:clrMapOvr>
-    <a:masterClrMapping/>
-  </p:clrMapOvr>
-</p:sld>
-</file>
-
-<file path=ppt/slides/slide9.xml><?xml version="1.0" encoding="utf-8"?>
-<p:sld xmlns:a="http://schemas.openxmlformats.org/drawingml/2006/main" xmlns:r="http://schemas.openxmlformats.org/officeDocument/2006/relationships" xmlns:p="http://schemas.openxmlformats.org/presentationml/2006/main">
-  <p:cSld name="Slide 9">
-    <p:spTree>
-      <p:nvGrpSpPr>
-        <p:cNvPr id="1" name=""/>
-        <p:cNvGrpSpPr/>
-        <p:nvPr/>
-      </p:nvGrpSpPr>
-      <p:grpSpPr>
-        <a:xfrm>
-          <a:off x="0" y="0"/>
-          <a:ext cx="0" cy="0"/>
-          <a:chOff x="0" y="0"/>
-          <a:chExt cx="0" cy="0"/>
-        </a:xfrm>
-      </p:grpSpPr>
-      <p:pic>
-        <p:nvPicPr>
-          <p:cNvPr id="2" name="Image 0" descr="preencoded.png"/>
-          <p:cNvPicPr>
-            <a:picLocks noChangeAspect="1"/>
-          </p:cNvPicPr>
-          <p:nvPr/>
-        </p:nvPicPr>
-        <p:blipFill>
-          <a:blip r:embed="rId3"/>
-          <a:stretch>
-            <a:fillRect/>
-          </a:stretch>
-        </p:blipFill>
-        <p:spPr>
-          <a:xfrm>
-            <a:off x="0" y="0"/>
-            <a:ext cx="14630400" cy="4265533"/>
-          </a:xfrm>
-          <a:prstGeom prst="rect">
-            <a:avLst/>
-          </a:prstGeom>
-        </p:spPr>
-      </p:pic>
-      <p:sp>
-        <p:nvSpPr>
-          <p:cNvPr id="3" name="Text 0"/>
-          <p:cNvSpPr/>
-          <p:nvPr/>
-        </p:nvSpPr>
-        <p:spPr>
-          <a:xfrm>
-            <a:off x="758309" y="4813221"/>
-            <a:ext cx="5701546" cy="712708"/>
-          </a:xfrm>
-          <a:prstGeom prst="rect">
-            <a:avLst/>
-          </a:prstGeom>
-          <a:noFill/>
-          <a:ln/>
-        </p:spPr>
-        <p:txBody>
-          <a:bodyPr wrap="none" lIns="0" tIns="0" rIns="0" bIns="0" rtlCol="0" anchor="t"/>
-          <a:lstStyle/>
-          <a:p>
-            <a:pPr marL="0" indent="0" algn="l">
-              <a:lnSpc>
-                <a:spcPts val="5600"/>
-              </a:lnSpc>
-              <a:buNone/>
-            </a:pPr>
-            <a:r>
-              <a:rPr lang="en-US" sz="4450" b="1" dirty="0">
-                <a:solidFill>
-                  <a:srgbClr val="2E3C4E"/>
-                </a:solidFill>
-                <a:latin typeface="Barlow Bold" pitchFamily="34" charset="0"/>
-                <a:ea typeface="Barlow Bold" pitchFamily="34" charset="-122"/>
-                <a:cs typeface="Barlow Bold" pitchFamily="34" charset="-120"/>
-              </a:rPr>
-              <a:t>Challenges</a:t>
-            </a:r>
-            <a:endParaRPr lang="en-US" sz="4450" dirty="0"/>
-          </a:p>
-        </p:txBody>
-      </p:sp>
-      <p:sp>
-        <p:nvSpPr>
-          <p:cNvPr id="4" name="Shape 1"/>
-          <p:cNvSpPr/>
-          <p:nvPr/>
-        </p:nvSpPr>
-        <p:spPr>
-          <a:xfrm>
-            <a:off x="758309" y="5850850"/>
-            <a:ext cx="4226838" cy="1627942"/>
-          </a:xfrm>
-          <a:prstGeom prst="roundRect">
-            <a:avLst>
-              <a:gd name="adj" fmla="val 19963"/>
-            </a:avLst>
-          </a:prstGeom>
-          <a:solidFill>
-            <a:srgbClr val="D4E9F7"/>
-          </a:solidFill>
-          <a:ln w="7620">
-            <a:solidFill>
-              <a:srgbClr val="BACFDD"/>
-            </a:solidFill>
-            <a:prstDash val="solid"/>
-          </a:ln>
-        </p:spPr>
-      </p:sp>
-      <p:sp>
-        <p:nvSpPr>
-          <p:cNvPr id="5" name="Text 2"/>
-          <p:cNvSpPr/>
-          <p:nvPr/>
-        </p:nvSpPr>
-        <p:spPr>
-          <a:xfrm>
-            <a:off x="982504" y="6075045"/>
-            <a:ext cx="2850713" cy="356235"/>
-          </a:xfrm>
-          <a:prstGeom prst="rect">
-            <a:avLst/>
-          </a:prstGeom>
-          <a:noFill/>
-          <a:ln/>
-        </p:spPr>
-        <p:txBody>
-          <a:bodyPr wrap="none" lIns="0" tIns="0" rIns="0" bIns="0" rtlCol="0" anchor="t"/>
-          <a:lstStyle/>
-          <a:p>
-            <a:pPr marL="0" indent="0" algn="l">
-              <a:lnSpc>
-                <a:spcPts val="2800"/>
-              </a:lnSpc>
-              <a:buNone/>
-            </a:pPr>
-            <a:r>
-              <a:rPr lang="en-US" sz="2200" b="1" dirty="0">
-                <a:solidFill>
-                  <a:srgbClr val="384653"/>
-                </a:solidFill>
-                <a:latin typeface="Barlow Bold" pitchFamily="34" charset="0"/>
-                <a:ea typeface="Barlow Bold" pitchFamily="34" charset="-122"/>
-                <a:cs typeface="Barlow Bold" pitchFamily="34" charset="-120"/>
-              </a:rPr>
-              <a:t>Class Confusion</a:t>
-            </a:r>
-            <a:endParaRPr lang="en-US" sz="2200" dirty="0"/>
-          </a:p>
-        </p:txBody>
-      </p:sp>
-      <p:sp>
-        <p:nvSpPr>
-          <p:cNvPr id="6" name="Text 3"/>
-          <p:cNvSpPr/>
-          <p:nvPr/>
-        </p:nvSpPr>
-        <p:spPr>
-          <a:xfrm>
-            <a:off x="982504" y="6561177"/>
-            <a:ext cx="3778448" cy="693420"/>
-          </a:xfrm>
-          <a:prstGeom prst="rect">
-            <a:avLst/>
-          </a:prstGeom>
-          <a:noFill/>
-          <a:ln/>
-        </p:spPr>
-        <p:txBody>
-          <a:bodyPr wrap="square" lIns="0" tIns="0" rIns="0" bIns="0" rtlCol="0" anchor="t"/>
-          <a:lstStyle/>
-          <a:p>
-            <a:pPr marL="0" indent="0" algn="l">
-              <a:lnSpc>
-                <a:spcPts val="2700"/>
-              </a:lnSpc>
-              <a:buNone/>
-            </a:pPr>
-            <a:r>
-              <a:rPr lang="en-US" sz="1700" dirty="0">
-                <a:solidFill>
-                  <a:srgbClr val="384653"/>
-                </a:solidFill>
-                <a:latin typeface="Montserrat" pitchFamily="34" charset="0"/>
-                <a:ea typeface="Montserrat" pitchFamily="34" charset="-122"/>
-                <a:cs typeface="Montserrat" pitchFamily="34" charset="-120"/>
-              </a:rPr>
-              <a:t>Visually identical capsules pose classification difficulties.</a:t>
-            </a:r>
-            <a:endParaRPr lang="en-US" sz="1700" dirty="0"/>
-          </a:p>
-        </p:txBody>
-      </p:sp>
-      <p:sp>
-        <p:nvSpPr>
-          <p:cNvPr id="7" name="Shape 4"/>
-          <p:cNvSpPr/>
-          <p:nvPr/>
-        </p:nvSpPr>
-        <p:spPr>
-          <a:xfrm>
-            <a:off x="5201722" y="5850850"/>
-            <a:ext cx="4226838" cy="1627942"/>
-          </a:xfrm>
-          <a:prstGeom prst="roundRect">
-            <a:avLst>
-              <a:gd name="adj" fmla="val 19963"/>
-            </a:avLst>
-          </a:prstGeom>
-          <a:solidFill>
-            <a:srgbClr val="D4E9F7"/>
-          </a:solidFill>
-          <a:ln w="7620">
-            <a:solidFill>
-              <a:srgbClr val="BACFDD"/>
-            </a:solidFill>
-            <a:prstDash val="solid"/>
-          </a:ln>
-        </p:spPr>
-      </p:sp>
-      <p:sp>
-        <p:nvSpPr>
-          <p:cNvPr id="8" name="Text 5"/>
-          <p:cNvSpPr/>
-          <p:nvPr/>
-        </p:nvSpPr>
-        <p:spPr>
-          <a:xfrm>
-            <a:off x="5425916" y="6075045"/>
-            <a:ext cx="2855595" cy="356235"/>
-          </a:xfrm>
-          <a:prstGeom prst="rect">
-            <a:avLst/>
-          </a:prstGeom>
-          <a:noFill/>
-          <a:ln/>
-        </p:spPr>
-        <p:txBody>
-          <a:bodyPr wrap="none" lIns="0" tIns="0" rIns="0" bIns="0" rtlCol="0" anchor="t"/>
-          <a:lstStyle/>
-          <a:p>
-            <a:pPr marL="0" indent="0" algn="l">
-              <a:lnSpc>
-                <a:spcPts val="2800"/>
-              </a:lnSpc>
-              <a:buNone/>
-            </a:pPr>
-            <a:r>
-              <a:rPr lang="en-US" sz="2200" b="1" dirty="0">
-                <a:solidFill>
-                  <a:srgbClr val="384653"/>
-                </a:solidFill>
-                <a:latin typeface="Barlow Bold" pitchFamily="34" charset="0"/>
-                <a:ea typeface="Barlow Bold" pitchFamily="34" charset="-122"/>
-                <a:cs typeface="Barlow Bold" pitchFamily="34" charset="-120"/>
-              </a:rPr>
-              <a:t>Environmental Factors</a:t>
-            </a:r>
-            <a:endParaRPr lang="en-US" sz="2200" dirty="0"/>
-          </a:p>
-        </p:txBody>
-      </p:sp>
-      <p:sp>
-        <p:nvSpPr>
-          <p:cNvPr id="9" name="Text 6"/>
-          <p:cNvSpPr/>
-          <p:nvPr/>
-        </p:nvSpPr>
-        <p:spPr>
-          <a:xfrm>
-            <a:off x="5425916" y="6561177"/>
-            <a:ext cx="3778448" cy="693420"/>
-          </a:xfrm>
-          <a:prstGeom prst="rect">
-            <a:avLst/>
-          </a:prstGeom>
-          <a:noFill/>
-          <a:ln/>
-        </p:spPr>
-        <p:txBody>
-          <a:bodyPr wrap="square" lIns="0" tIns="0" rIns="0" bIns="0" rtlCol="0" anchor="t"/>
-          <a:lstStyle/>
-          <a:p>
-            <a:pPr marL="0" indent="0" algn="l">
-              <a:lnSpc>
-                <a:spcPts val="2700"/>
-              </a:lnSpc>
-              <a:buNone/>
-            </a:pPr>
-            <a:r>
-              <a:rPr lang="en-US" sz="1700" dirty="0">
-                <a:solidFill>
-                  <a:srgbClr val="384653"/>
-                </a:solidFill>
-                <a:latin typeface="Montserrat" pitchFamily="34" charset="0"/>
-                <a:ea typeface="Montserrat" pitchFamily="34" charset="-122"/>
-                <a:cs typeface="Montserrat" pitchFamily="34" charset="-120"/>
-              </a:rPr>
-              <a:t>Lighting, blur, and camera quality impact detection accuracy.</a:t>
-            </a:r>
-            <a:endParaRPr lang="en-US" sz="1700" dirty="0"/>
-          </a:p>
-        </p:txBody>
-      </p:sp>
-      <p:sp>
-        <p:nvSpPr>
-          <p:cNvPr id="10" name="Shape 7"/>
-          <p:cNvSpPr/>
-          <p:nvPr/>
-        </p:nvSpPr>
-        <p:spPr>
-          <a:xfrm>
-            <a:off x="9645134" y="5850850"/>
-            <a:ext cx="4226957" cy="1627942"/>
-          </a:xfrm>
-          <a:prstGeom prst="roundRect">
-            <a:avLst>
-              <a:gd name="adj" fmla="val 19963"/>
-            </a:avLst>
-          </a:prstGeom>
-          <a:solidFill>
-            <a:srgbClr val="D4E9F7"/>
-          </a:solidFill>
-          <a:ln w="7620">
-            <a:solidFill>
-              <a:srgbClr val="BACFDD"/>
-            </a:solidFill>
-            <a:prstDash val="solid"/>
-          </a:ln>
-        </p:spPr>
-      </p:sp>
-      <p:sp>
-        <p:nvSpPr>
-          <p:cNvPr id="11" name="Text 8"/>
-          <p:cNvSpPr/>
-          <p:nvPr/>
-        </p:nvSpPr>
-        <p:spPr>
-          <a:xfrm>
-            <a:off x="9869329" y="6075045"/>
-            <a:ext cx="2850713" cy="356235"/>
-          </a:xfrm>
-          <a:prstGeom prst="rect">
-            <a:avLst/>
-          </a:prstGeom>
-          <a:noFill/>
-          <a:ln/>
-        </p:spPr>
-        <p:txBody>
-          <a:bodyPr wrap="none" lIns="0" tIns="0" rIns="0" bIns="0" rtlCol="0" anchor="t"/>
-          <a:lstStyle/>
-          <a:p>
-            <a:pPr marL="0" indent="0" algn="l">
-              <a:lnSpc>
-                <a:spcPts val="2800"/>
-              </a:lnSpc>
-              <a:buNone/>
-            </a:pPr>
-            <a:r>
-              <a:rPr lang="en-US" sz="2200" b="1" dirty="0">
-                <a:solidFill>
-                  <a:srgbClr val="384653"/>
-                </a:solidFill>
-                <a:latin typeface="Barlow Bold" pitchFamily="34" charset="0"/>
-                <a:ea typeface="Barlow Bold" pitchFamily="34" charset="-122"/>
-                <a:cs typeface="Barlow Bold" pitchFamily="34" charset="-120"/>
-              </a:rPr>
-              <a:t>Dataset Limitations</a:t>
-            </a:r>
-            <a:endParaRPr lang="en-US" sz="2200" dirty="0"/>
-          </a:p>
-        </p:txBody>
-      </p:sp>
-      <p:sp>
-        <p:nvSpPr>
-          <p:cNvPr id="12" name="Text 9"/>
-          <p:cNvSpPr/>
-          <p:nvPr/>
-        </p:nvSpPr>
-        <p:spPr>
-          <a:xfrm>
-            <a:off x="9869329" y="6561177"/>
-            <a:ext cx="3778568" cy="693420"/>
-          </a:xfrm>
-          <a:prstGeom prst="rect">
-            <a:avLst/>
-          </a:prstGeom>
-          <a:noFill/>
-          <a:ln/>
-        </p:spPr>
-        <p:txBody>
-          <a:bodyPr wrap="square" lIns="0" tIns="0" rIns="0" bIns="0" rtlCol="0" anchor="t"/>
-          <a:lstStyle/>
-          <a:p>
-            <a:pPr marL="0" indent="0" algn="l">
-              <a:lnSpc>
-                <a:spcPts val="2700"/>
-              </a:lnSpc>
-              <a:buNone/>
-            </a:pPr>
-            <a:r>
-              <a:rPr lang="en-US" sz="1700" dirty="0">
-                <a:solidFill>
-                  <a:srgbClr val="384653"/>
-                </a:solidFill>
-                <a:latin typeface="Montserrat" pitchFamily="34" charset="0"/>
-                <a:ea typeface="Montserrat" pitchFamily="34" charset="-122"/>
-                <a:cs typeface="Montserrat" pitchFamily="34" charset="-120"/>
-              </a:rPr>
-              <a:t>Limited diversity in the current dataset.</a:t>
-            </a:r>
-            <a:endParaRPr lang="en-US" sz="1700" dirty="0"/>
-          </a:p>
-        </p:txBody>
-      </p:sp>
-      <p:sp>
-        <p:nvSpPr>
-          <p:cNvPr id="13" name="Rectangle 12">
-            <a:extLst>
-              <a:ext uri="{FF2B5EF4-FFF2-40B4-BE49-F238E27FC236}">
-                <a16:creationId xmlns:a16="http://schemas.microsoft.com/office/drawing/2014/main" id="{C460A0E1-5137-4DBF-8C59-6A9EB24A1D0D}"/>
               </a:ext>
             </a:extLst>
           </p:cNvPr>

--- a/Capsule-Counterfeit-Detection-Using-Deep-Learning.pptx
+++ b/Capsule-Counterfeit-Detection-Using-Deep-Learning.pptx
@@ -25,7 +25,7 @@
   <p:notesSz cx="8229600" cy="14630400"/>
   <p:embeddedFontLst>
     <p:embeddedFont>
-      <p:font typeface="Barlow Bold" panose="00000800000000000000" pitchFamily="2" charset="0"/>
+      <p:font typeface="Barlow Bold" panose="020B0604020202020204" charset="0"/>
       <p:bold r:id="rId15"/>
     </p:embeddedFont>
     <p:embeddedFont>
@@ -8720,7 +8720,7 @@
                 <a:ea typeface="Montserrat" pitchFamily="34" charset="-122"/>
                 <a:cs typeface="Montserrat" pitchFamily="34" charset="-120"/>
               </a:rPr>
-              <a:t>Accuracy: 0.9965</a:t>
+              <a:t>Accuracy: 0.8965</a:t>
             </a:r>
             <a:r>
               <a:rPr lang="en-US" sz="1700" dirty="0">
@@ -8774,7 +8774,7 @@
                 <a:ea typeface="Montserrat" pitchFamily="34" charset="-122"/>
                 <a:cs typeface="Montserrat" pitchFamily="34" charset="-120"/>
               </a:rPr>
-              <a:t>Precision: 0.9962</a:t>
+              <a:t>Precision: 0.8662</a:t>
             </a:r>
             <a:r>
               <a:rPr lang="en-US" sz="1700" dirty="0">
@@ -8828,7 +8828,7 @@
                 <a:ea typeface="Montserrat" pitchFamily="34" charset="-122"/>
                 <a:cs typeface="Montserrat" pitchFamily="34" charset="-120"/>
               </a:rPr>
-              <a:t>Recall: 0.9968</a:t>
+              <a:t>Recall: 0.9314</a:t>
             </a:r>
             <a:r>
               <a:rPr lang="en-US" sz="1700" dirty="0">
@@ -8882,7 +8882,7 @@
                 <a:ea typeface="Montserrat" pitchFamily="34" charset="-122"/>
                 <a:cs typeface="Montserrat" pitchFamily="34" charset="-120"/>
               </a:rPr>
-              <a:t>F1 Score: 0.9965</a:t>
+              <a:t>F1 Score: 0.8962</a:t>
             </a:r>
             <a:r>
               <a:rPr lang="en-US" sz="1700" dirty="0">
